--- a/make_presentation/templates/templates/flow/_12.pptx
+++ b/make_presentation/templates/templates/flow/_12.pptx
@@ -71,20 +71,17 @@
             <a:noAutofit/>
           </a:bodyPr>
           <a:p>
-            <a:r>
-              <a:rPr b="0" lang="en-US" sz="1800" spc="-1" strike="noStrike">
-                <a:solidFill>
-                  <a:srgbClr val="000000"/>
-                </a:solidFill>
-                <a:latin typeface="Calibri"/>
+            <a:pPr algn="ctr">
+              <a:buNone/>
+            </a:pPr>
+            <a:r>
+              <a:rPr b="0" lang="en-US" sz="4400" spc="-1" strike="noStrike">
+                <a:latin typeface="Arial"/>
               </a:rPr>
               <a:t>Click to move the slide</a:t>
             </a:r>
-            <a:endParaRPr b="0" lang="en-US" sz="1800" spc="-1" strike="noStrike">
-              <a:solidFill>
-                <a:srgbClr val="000000"/>
-              </a:solidFill>
-              <a:latin typeface="Calibri"/>
+            <a:endParaRPr b="0" lang="en-US" sz="4400" spc="-1" strike="noStrike">
+              <a:latin typeface="Arial"/>
             </a:endParaRPr>
           </a:p>
         </p:txBody>
@@ -306,7 +303,7 @@
             <a:pPr algn="r">
               <a:buNone/>
             </a:pPr>
-            <a:fld id="{5B84DCAB-C0B3-4701-BD71-39558AF24EC5}" type="slidenum">
+            <a:fld id="{525ADE1F-C5DE-468F-BCD9-D4B1C1E88333}" type="slidenum">
               <a:rPr b="0" lang="en-US" sz="1400" spc="-1" strike="noStrike">
                 <a:latin typeface="Times New Roman"/>
               </a:rPr>
@@ -343,7 +340,7 @@
       </p:grpSpPr>
       <p:sp>
         <p:nvSpPr>
-          <p:cNvPr id="183" name="PlaceHolder 1"/>
+          <p:cNvPr id="182" name="PlaceHolder 1"/>
           <p:cNvSpPr>
             <a:spLocks noGrp="1"/>
           </p:cNvSpPr>
@@ -354,19 +351,19 @@
         <p:spPr>
           <a:xfrm>
             <a:off x="685800" y="1143000"/>
-            <a:ext cx="5486040" cy="3085920"/>
-          </a:xfrm>
-          <a:prstGeom prst="rect">
-            <a:avLst/>
-          </a:prstGeom>
-          <a:ln w="0">
-            <a:noFill/>
-          </a:ln>
-        </p:spPr>
-      </p:sp>
-      <p:sp>
-        <p:nvSpPr>
-          <p:cNvPr id="184" name="PlaceHolder 2"/>
+            <a:ext cx="5485680" cy="3085560"/>
+          </a:xfrm>
+          <a:prstGeom prst="rect">
+            <a:avLst/>
+          </a:prstGeom>
+          <a:ln w="0">
+            <a:noFill/>
+          </a:ln>
+        </p:spPr>
+      </p:sp>
+      <p:sp>
+        <p:nvSpPr>
+          <p:cNvPr id="183" name="PlaceHolder 2"/>
           <p:cNvSpPr>
             <a:spLocks noGrp="1"/>
           </p:cNvSpPr>
@@ -377,18 +374,18 @@
         <p:spPr>
           <a:xfrm>
             <a:off x="685800" y="4400640"/>
-            <a:ext cx="5486040" cy="3600000"/>
-          </a:xfrm>
-          <a:prstGeom prst="rect">
-            <a:avLst/>
-          </a:prstGeom>
-          <a:noFill/>
-          <a:ln w="0">
-            <a:noFill/>
-          </a:ln>
-        </p:spPr>
-        <p:txBody>
-          <a:bodyPr anchor="t">
+            <a:ext cx="5485680" cy="3599640"/>
+          </a:xfrm>
+          <a:prstGeom prst="rect">
+            <a:avLst/>
+          </a:prstGeom>
+          <a:noFill/>
+          <a:ln w="0">
+            <a:noFill/>
+          </a:ln>
+        </p:spPr>
+        <p:txBody>
+          <a:bodyPr lIns="0" rIns="0" tIns="0" bIns="0" anchor="t">
             <a:noAutofit/>
           </a:bodyPr>
           <a:p>
@@ -400,7 +397,7 @@
       </p:sp>
       <p:sp>
         <p:nvSpPr>
-          <p:cNvPr id="185" name="PlaceHolder 3"/>
+          <p:cNvPr id="184" name="PlaceHolder 3"/>
           <p:cNvSpPr>
             <a:spLocks noGrp="1"/>
           </p:cNvSpPr>
@@ -411,18 +408,18 @@
         <p:spPr>
           <a:xfrm>
             <a:off x="3884760" y="8685360"/>
-            <a:ext cx="2971440" cy="458280"/>
-          </a:xfrm>
-          <a:prstGeom prst="rect">
-            <a:avLst/>
-          </a:prstGeom>
-          <a:noFill/>
-          <a:ln w="0">
-            <a:noFill/>
-          </a:ln>
-        </p:spPr>
-        <p:txBody>
-          <a:bodyPr anchor="b">
+            <a:ext cx="2971080" cy="457920"/>
+          </a:xfrm>
+          <a:prstGeom prst="rect">
+            <a:avLst/>
+          </a:prstGeom>
+          <a:noFill/>
+          <a:ln w="0">
+            <a:noFill/>
+          </a:ln>
+        </p:spPr>
+        <p:txBody>
+          <a:bodyPr lIns="0" rIns="0" tIns="0" bIns="0" anchor="b">
             <a:noAutofit/>
           </a:bodyPr>
           <a:lstStyle>
@@ -443,7 +440,7 @@
               </a:lnSpc>
               <a:buNone/>
             </a:pPr>
-            <a:fld id="{48B3D6CA-0379-4888-823E-8ED4261FD823}" type="slidenum">
+            <a:fld id="{C5733D33-A794-418E-91DA-BCDCA92F84FB}" type="slidenum">
               <a:rPr b="0" lang="ru-RU" sz="1200" spc="-1" strike="noStrike">
                 <a:latin typeface="Times New Roman"/>
               </a:rPr>
@@ -479,7 +476,7 @@
       </p:grpSpPr>
       <p:sp>
         <p:nvSpPr>
-          <p:cNvPr id="186" name="PlaceHolder 1"/>
+          <p:cNvPr id="185" name="PlaceHolder 1"/>
           <p:cNvSpPr>
             <a:spLocks noGrp="1"/>
           </p:cNvSpPr>
@@ -490,19 +487,19 @@
         <p:spPr>
           <a:xfrm>
             <a:off x="685800" y="1143000"/>
-            <a:ext cx="5486040" cy="3085920"/>
-          </a:xfrm>
-          <a:prstGeom prst="rect">
-            <a:avLst/>
-          </a:prstGeom>
-          <a:ln w="0">
-            <a:noFill/>
-          </a:ln>
-        </p:spPr>
-      </p:sp>
-      <p:sp>
-        <p:nvSpPr>
-          <p:cNvPr id="187" name="PlaceHolder 2"/>
+            <a:ext cx="5485680" cy="3085560"/>
+          </a:xfrm>
+          <a:prstGeom prst="rect">
+            <a:avLst/>
+          </a:prstGeom>
+          <a:ln w="0">
+            <a:noFill/>
+          </a:ln>
+        </p:spPr>
+      </p:sp>
+      <p:sp>
+        <p:nvSpPr>
+          <p:cNvPr id="186" name="PlaceHolder 2"/>
           <p:cNvSpPr>
             <a:spLocks noGrp="1"/>
           </p:cNvSpPr>
@@ -513,18 +510,18 @@
         <p:spPr>
           <a:xfrm>
             <a:off x="685800" y="4400640"/>
-            <a:ext cx="5486040" cy="3600000"/>
-          </a:xfrm>
-          <a:prstGeom prst="rect">
-            <a:avLst/>
-          </a:prstGeom>
-          <a:noFill/>
-          <a:ln w="0">
-            <a:noFill/>
-          </a:ln>
-        </p:spPr>
-        <p:txBody>
-          <a:bodyPr anchor="t">
+            <a:ext cx="5485680" cy="3599640"/>
+          </a:xfrm>
+          <a:prstGeom prst="rect">
+            <a:avLst/>
+          </a:prstGeom>
+          <a:noFill/>
+          <a:ln w="0">
+            <a:noFill/>
+          </a:ln>
+        </p:spPr>
+        <p:txBody>
+          <a:bodyPr lIns="0" rIns="0" tIns="0" bIns="0" anchor="t">
             <a:noAutofit/>
           </a:bodyPr>
           <a:p>
@@ -536,7 +533,7 @@
       </p:sp>
       <p:sp>
         <p:nvSpPr>
-          <p:cNvPr id="188" name="PlaceHolder 3"/>
+          <p:cNvPr id="187" name="PlaceHolder 3"/>
           <p:cNvSpPr>
             <a:spLocks noGrp="1"/>
           </p:cNvSpPr>
@@ -547,18 +544,18 @@
         <p:spPr>
           <a:xfrm>
             <a:off x="3884760" y="8685360"/>
-            <a:ext cx="2971440" cy="458280"/>
-          </a:xfrm>
-          <a:prstGeom prst="rect">
-            <a:avLst/>
-          </a:prstGeom>
-          <a:noFill/>
-          <a:ln w="0">
-            <a:noFill/>
-          </a:ln>
-        </p:spPr>
-        <p:txBody>
-          <a:bodyPr anchor="b">
+            <a:ext cx="2971080" cy="457920"/>
+          </a:xfrm>
+          <a:prstGeom prst="rect">
+            <a:avLst/>
+          </a:prstGeom>
+          <a:noFill/>
+          <a:ln w="0">
+            <a:noFill/>
+          </a:ln>
+        </p:spPr>
+        <p:txBody>
+          <a:bodyPr lIns="0" rIns="0" tIns="0" bIns="0" anchor="b">
             <a:noAutofit/>
           </a:bodyPr>
           <a:lstStyle>
@@ -579,7 +576,7 @@
               </a:lnSpc>
               <a:buNone/>
             </a:pPr>
-            <a:fld id="{D9CE2D08-D212-48CA-B108-0BD23963E507}" type="slidenum">
+            <a:fld id="{3D9E1D95-B10C-4B64-9128-922C0DAFFDF8}" type="slidenum">
               <a:rPr b="0" lang="ru-RU" sz="1200" spc="-1" strike="noStrike">
                 <a:latin typeface="Times New Roman"/>
               </a:rPr>
@@ -615,7 +612,7 @@
       </p:grpSpPr>
       <p:sp>
         <p:nvSpPr>
-          <p:cNvPr id="174" name="PlaceHolder 1"/>
+          <p:cNvPr id="173" name="PlaceHolder 1"/>
           <p:cNvSpPr>
             <a:spLocks noGrp="1"/>
           </p:cNvSpPr>
@@ -626,19 +623,19 @@
         <p:spPr>
           <a:xfrm>
             <a:off x="685800" y="1143000"/>
-            <a:ext cx="5486040" cy="3085920"/>
-          </a:xfrm>
-          <a:prstGeom prst="rect">
-            <a:avLst/>
-          </a:prstGeom>
-          <a:ln w="0">
-            <a:noFill/>
-          </a:ln>
-        </p:spPr>
-      </p:sp>
-      <p:sp>
-        <p:nvSpPr>
-          <p:cNvPr id="175" name="PlaceHolder 2"/>
+            <a:ext cx="5485680" cy="3085560"/>
+          </a:xfrm>
+          <a:prstGeom prst="rect">
+            <a:avLst/>
+          </a:prstGeom>
+          <a:ln w="0">
+            <a:noFill/>
+          </a:ln>
+        </p:spPr>
+      </p:sp>
+      <p:sp>
+        <p:nvSpPr>
+          <p:cNvPr id="174" name="PlaceHolder 2"/>
           <p:cNvSpPr>
             <a:spLocks noGrp="1"/>
           </p:cNvSpPr>
@@ -649,18 +646,18 @@
         <p:spPr>
           <a:xfrm>
             <a:off x="685800" y="4400640"/>
-            <a:ext cx="5486040" cy="3600000"/>
-          </a:xfrm>
-          <a:prstGeom prst="rect">
-            <a:avLst/>
-          </a:prstGeom>
-          <a:noFill/>
-          <a:ln w="0">
-            <a:noFill/>
-          </a:ln>
-        </p:spPr>
-        <p:txBody>
-          <a:bodyPr anchor="t">
+            <a:ext cx="5485680" cy="3599640"/>
+          </a:xfrm>
+          <a:prstGeom prst="rect">
+            <a:avLst/>
+          </a:prstGeom>
+          <a:noFill/>
+          <a:ln w="0">
+            <a:noFill/>
+          </a:ln>
+        </p:spPr>
+        <p:txBody>
+          <a:bodyPr lIns="0" rIns="0" tIns="0" bIns="0" anchor="t">
             <a:noAutofit/>
           </a:bodyPr>
           <a:p>
@@ -672,7 +669,7 @@
       </p:sp>
       <p:sp>
         <p:nvSpPr>
-          <p:cNvPr id="176" name="PlaceHolder 3"/>
+          <p:cNvPr id="175" name="PlaceHolder 3"/>
           <p:cNvSpPr>
             <a:spLocks noGrp="1"/>
           </p:cNvSpPr>
@@ -683,18 +680,18 @@
         <p:spPr>
           <a:xfrm>
             <a:off x="3884760" y="8685360"/>
-            <a:ext cx="2971440" cy="458280"/>
-          </a:xfrm>
-          <a:prstGeom prst="rect">
-            <a:avLst/>
-          </a:prstGeom>
-          <a:noFill/>
-          <a:ln w="0">
-            <a:noFill/>
-          </a:ln>
-        </p:spPr>
-        <p:txBody>
-          <a:bodyPr anchor="b">
+            <a:ext cx="2971080" cy="457920"/>
+          </a:xfrm>
+          <a:prstGeom prst="rect">
+            <a:avLst/>
+          </a:prstGeom>
+          <a:noFill/>
+          <a:ln w="0">
+            <a:noFill/>
+          </a:ln>
+        </p:spPr>
+        <p:txBody>
+          <a:bodyPr lIns="0" rIns="0" tIns="0" bIns="0" anchor="b">
             <a:noAutofit/>
           </a:bodyPr>
           <a:lstStyle>
@@ -715,7 +712,7 @@
               </a:lnSpc>
               <a:buNone/>
             </a:pPr>
-            <a:fld id="{7F17A50F-7A7B-45D4-B0D0-EA2988F4560F}" type="slidenum">
+            <a:fld id="{BB2137BB-2947-476C-AC1A-262F331C685A}" type="slidenum">
               <a:rPr b="0" lang="ru-RU" sz="1200" spc="-1" strike="noStrike">
                 <a:latin typeface="Times New Roman"/>
               </a:rPr>
@@ -751,7 +748,7 @@
       </p:grpSpPr>
       <p:sp>
         <p:nvSpPr>
-          <p:cNvPr id="177" name="PlaceHolder 1"/>
+          <p:cNvPr id="176" name="PlaceHolder 1"/>
           <p:cNvSpPr>
             <a:spLocks noGrp="1"/>
           </p:cNvSpPr>
@@ -762,19 +759,19 @@
         <p:spPr>
           <a:xfrm>
             <a:off x="685800" y="1143000"/>
-            <a:ext cx="5486040" cy="3085920"/>
-          </a:xfrm>
-          <a:prstGeom prst="rect">
-            <a:avLst/>
-          </a:prstGeom>
-          <a:ln w="0">
-            <a:noFill/>
-          </a:ln>
-        </p:spPr>
-      </p:sp>
-      <p:sp>
-        <p:nvSpPr>
-          <p:cNvPr id="178" name="PlaceHolder 2"/>
+            <a:ext cx="5485680" cy="3085560"/>
+          </a:xfrm>
+          <a:prstGeom prst="rect">
+            <a:avLst/>
+          </a:prstGeom>
+          <a:ln w="0">
+            <a:noFill/>
+          </a:ln>
+        </p:spPr>
+      </p:sp>
+      <p:sp>
+        <p:nvSpPr>
+          <p:cNvPr id="177" name="PlaceHolder 2"/>
           <p:cNvSpPr>
             <a:spLocks noGrp="1"/>
           </p:cNvSpPr>
@@ -785,18 +782,18 @@
         <p:spPr>
           <a:xfrm>
             <a:off x="685800" y="4400640"/>
-            <a:ext cx="5486040" cy="3600000"/>
-          </a:xfrm>
-          <a:prstGeom prst="rect">
-            <a:avLst/>
-          </a:prstGeom>
-          <a:noFill/>
-          <a:ln w="0">
-            <a:noFill/>
-          </a:ln>
-        </p:spPr>
-        <p:txBody>
-          <a:bodyPr anchor="t">
+            <a:ext cx="5485680" cy="3599640"/>
+          </a:xfrm>
+          <a:prstGeom prst="rect">
+            <a:avLst/>
+          </a:prstGeom>
+          <a:noFill/>
+          <a:ln w="0">
+            <a:noFill/>
+          </a:ln>
+        </p:spPr>
+        <p:txBody>
+          <a:bodyPr lIns="0" rIns="0" tIns="0" bIns="0" anchor="t">
             <a:noAutofit/>
           </a:bodyPr>
           <a:p>
@@ -808,7 +805,7 @@
       </p:sp>
       <p:sp>
         <p:nvSpPr>
-          <p:cNvPr id="179" name="PlaceHolder 3"/>
+          <p:cNvPr id="178" name="PlaceHolder 3"/>
           <p:cNvSpPr>
             <a:spLocks noGrp="1"/>
           </p:cNvSpPr>
@@ -819,18 +816,18 @@
         <p:spPr>
           <a:xfrm>
             <a:off x="3884760" y="8685360"/>
-            <a:ext cx="2971440" cy="458280"/>
-          </a:xfrm>
-          <a:prstGeom prst="rect">
-            <a:avLst/>
-          </a:prstGeom>
-          <a:noFill/>
-          <a:ln w="0">
-            <a:noFill/>
-          </a:ln>
-        </p:spPr>
-        <p:txBody>
-          <a:bodyPr anchor="b">
+            <a:ext cx="2971080" cy="457920"/>
+          </a:xfrm>
+          <a:prstGeom prst="rect">
+            <a:avLst/>
+          </a:prstGeom>
+          <a:noFill/>
+          <a:ln w="0">
+            <a:noFill/>
+          </a:ln>
+        </p:spPr>
+        <p:txBody>
+          <a:bodyPr lIns="0" rIns="0" tIns="0" bIns="0" anchor="b">
             <a:noAutofit/>
           </a:bodyPr>
           <a:lstStyle>
@@ -851,7 +848,7 @@
               </a:lnSpc>
               <a:buNone/>
             </a:pPr>
-            <a:fld id="{53916158-40EE-4B2E-ADA9-48099C29E221}" type="slidenum">
+            <a:fld id="{C38C5C72-7116-4FF7-98F1-BCAAEEA67472}" type="slidenum">
               <a:rPr b="0" lang="ru-RU" sz="1200" spc="-1" strike="noStrike">
                 <a:latin typeface="Times New Roman"/>
               </a:rPr>
@@ -887,7 +884,7 @@
       </p:grpSpPr>
       <p:sp>
         <p:nvSpPr>
-          <p:cNvPr id="180" name="PlaceHolder 1"/>
+          <p:cNvPr id="179" name="PlaceHolder 1"/>
           <p:cNvSpPr>
             <a:spLocks noGrp="1"/>
           </p:cNvSpPr>
@@ -898,19 +895,19 @@
         <p:spPr>
           <a:xfrm>
             <a:off x="685800" y="1143000"/>
-            <a:ext cx="5486040" cy="3085920"/>
-          </a:xfrm>
-          <a:prstGeom prst="rect">
-            <a:avLst/>
-          </a:prstGeom>
-          <a:ln w="0">
-            <a:noFill/>
-          </a:ln>
-        </p:spPr>
-      </p:sp>
-      <p:sp>
-        <p:nvSpPr>
-          <p:cNvPr id="181" name="PlaceHolder 2"/>
+            <a:ext cx="5485680" cy="3085560"/>
+          </a:xfrm>
+          <a:prstGeom prst="rect">
+            <a:avLst/>
+          </a:prstGeom>
+          <a:ln w="0">
+            <a:noFill/>
+          </a:ln>
+        </p:spPr>
+      </p:sp>
+      <p:sp>
+        <p:nvSpPr>
+          <p:cNvPr id="180" name="PlaceHolder 2"/>
           <p:cNvSpPr>
             <a:spLocks noGrp="1"/>
           </p:cNvSpPr>
@@ -921,18 +918,18 @@
         <p:spPr>
           <a:xfrm>
             <a:off x="685800" y="4400640"/>
-            <a:ext cx="5486040" cy="3600000"/>
-          </a:xfrm>
-          <a:prstGeom prst="rect">
-            <a:avLst/>
-          </a:prstGeom>
-          <a:noFill/>
-          <a:ln w="0">
-            <a:noFill/>
-          </a:ln>
-        </p:spPr>
-        <p:txBody>
-          <a:bodyPr anchor="t">
+            <a:ext cx="5485680" cy="3599640"/>
+          </a:xfrm>
+          <a:prstGeom prst="rect">
+            <a:avLst/>
+          </a:prstGeom>
+          <a:noFill/>
+          <a:ln w="0">
+            <a:noFill/>
+          </a:ln>
+        </p:spPr>
+        <p:txBody>
+          <a:bodyPr lIns="0" rIns="0" tIns="0" bIns="0" anchor="t">
             <a:noAutofit/>
           </a:bodyPr>
           <a:p>
@@ -944,7 +941,7 @@
       </p:sp>
       <p:sp>
         <p:nvSpPr>
-          <p:cNvPr id="182" name="PlaceHolder 3"/>
+          <p:cNvPr id="181" name="PlaceHolder 3"/>
           <p:cNvSpPr>
             <a:spLocks noGrp="1"/>
           </p:cNvSpPr>
@@ -955,18 +952,18 @@
         <p:spPr>
           <a:xfrm>
             <a:off x="3884760" y="8685360"/>
-            <a:ext cx="2971440" cy="458280"/>
-          </a:xfrm>
-          <a:prstGeom prst="rect">
-            <a:avLst/>
-          </a:prstGeom>
-          <a:noFill/>
-          <a:ln w="0">
-            <a:noFill/>
-          </a:ln>
-        </p:spPr>
-        <p:txBody>
-          <a:bodyPr anchor="b">
+            <a:ext cx="2971080" cy="457920"/>
+          </a:xfrm>
+          <a:prstGeom prst="rect">
+            <a:avLst/>
+          </a:prstGeom>
+          <a:noFill/>
+          <a:ln w="0">
+            <a:noFill/>
+          </a:ln>
+        </p:spPr>
+        <p:txBody>
+          <a:bodyPr lIns="0" rIns="0" tIns="0" bIns="0" anchor="b">
             <a:noAutofit/>
           </a:bodyPr>
           <a:lstStyle>
@@ -987,7 +984,7 @@
               </a:lnSpc>
               <a:buNone/>
             </a:pPr>
-            <a:fld id="{1AB71E51-5866-4B23-B4D6-9E7A9244ADCE}" type="slidenum">
+            <a:fld id="{D93FF030-859A-4F90-8C8F-DD19C2159694}" type="slidenum">
               <a:rPr b="0" lang="ru-RU" sz="1200" spc="-1" strike="noStrike">
                 <a:latin typeface="Times New Roman"/>
               </a:rPr>
@@ -1028,7 +1025,7 @@
             <a:spLocks noGrp="1"/>
           </p:cNvSpPr>
           <p:nvPr>
-            <p:ph type="ftr" idx="2"/>
+            <p:ph type="ftr" idx="1"/>
           </p:nvPr>
         </p:nvSpPr>
         <p:spPr/>
@@ -1048,14 +1045,14 @@
             <a:spLocks noGrp="1"/>
           </p:cNvSpPr>
           <p:nvPr>
-            <p:ph type="sldNum" idx="3"/>
+            <p:ph type="sldNum" idx="2"/>
           </p:nvPr>
         </p:nvSpPr>
         <p:spPr/>
         <p:txBody>
           <a:bodyPr/>
           <a:p>
-            <a:fld id="{A0AAE24C-AD2F-4A94-A19E-8CC3A3A262FC}" type="slidenum">
+            <a:fld id="{5DC91310-AD45-4EC0-A5D3-60F6CC37F1BB}" type="slidenum">
               <a:t>&lt;#&gt;</a:t>
             </a:fld>
           </a:p>
@@ -1068,7 +1065,7 @@
             <a:spLocks noGrp="1"/>
           </p:cNvSpPr>
           <p:nvPr>
-            <p:ph type="dt" idx="1"/>
+            <p:ph type="dt" idx="3"/>
           </p:nvPr>
         </p:nvSpPr>
         <p:spPr/>
@@ -1117,7 +1114,7 @@
         <p:spPr>
           <a:xfrm>
             <a:off x="1143000" y="841680"/>
-            <a:ext cx="6857640" cy="1790280"/>
+            <a:ext cx="6857280" cy="1789920"/>
           </a:xfrm>
           <a:prstGeom prst="rect">
             <a:avLst/>
@@ -1132,11 +1129,11 @@
             <a:noAutofit/>
           </a:bodyPr>
           <a:p>
-            <a:endParaRPr b="0" lang="en-US" sz="1800" spc="-1" strike="noStrike">
-              <a:solidFill>
-                <a:srgbClr val="000000"/>
-              </a:solidFill>
-              <a:latin typeface="Calibri"/>
+            <a:pPr algn="ctr">
+              <a:buNone/>
+            </a:pPr>
+            <a:endParaRPr b="0" lang="en-US" sz="4400" spc="-1" strike="noStrike">
+              <a:latin typeface="Arial"/>
             </a:endParaRPr>
           </a:p>
         </p:txBody>
@@ -1169,20 +1166,8 @@
             <a:normAutofit/>
           </a:bodyPr>
           <a:p>
-            <a:pPr>
-              <a:lnSpc>
-                <a:spcPct val="90000"/>
-              </a:lnSpc>
-              <a:spcBef>
-                <a:spcPts val="1417"/>
-              </a:spcBef>
-              <a:buNone/>
-            </a:pPr>
-            <a:endParaRPr b="0" lang="en-US" sz="2100" spc="-1" strike="noStrike">
-              <a:solidFill>
-                <a:srgbClr val="000000"/>
-              </a:solidFill>
-              <a:latin typeface="Calibri"/>
+            <a:endParaRPr b="0" lang="en-US" sz="3200" spc="-1" strike="noStrike">
+              <a:latin typeface="Arial"/>
             </a:endParaRPr>
           </a:p>
         </p:txBody>
@@ -1215,20 +1200,8 @@
             <a:normAutofit/>
           </a:bodyPr>
           <a:p>
-            <a:pPr>
-              <a:lnSpc>
-                <a:spcPct val="90000"/>
-              </a:lnSpc>
-              <a:spcBef>
-                <a:spcPts val="1417"/>
-              </a:spcBef>
-              <a:buNone/>
-            </a:pPr>
-            <a:endParaRPr b="0" lang="en-US" sz="2100" spc="-1" strike="noStrike">
-              <a:solidFill>
-                <a:srgbClr val="000000"/>
-              </a:solidFill>
-              <a:latin typeface="Calibri"/>
+            <a:endParaRPr b="0" lang="en-US" sz="3200" spc="-1" strike="noStrike">
+              <a:latin typeface="Arial"/>
             </a:endParaRPr>
           </a:p>
         </p:txBody>
@@ -1240,7 +1213,7 @@
             <a:spLocks noGrp="1"/>
           </p:cNvSpPr>
           <p:nvPr>
-            <p:ph type="ftr" idx="2"/>
+            <p:ph type="ftr" idx="1"/>
           </p:nvPr>
         </p:nvSpPr>
         <p:spPr/>
@@ -1260,14 +1233,14 @@
             <a:spLocks noGrp="1"/>
           </p:cNvSpPr>
           <p:nvPr>
-            <p:ph type="sldNum" idx="3"/>
+            <p:ph type="sldNum" idx="2"/>
           </p:nvPr>
         </p:nvSpPr>
         <p:spPr/>
         <p:txBody>
           <a:bodyPr/>
           <a:p>
-            <a:fld id="{499D96FC-8E79-4100-AF3E-B381B7B560D1}" type="slidenum">
+            <a:fld id="{88532941-C78D-40A1-A991-9B48E4C544A9}" type="slidenum">
               <a:t>&lt;#&gt;</a:t>
             </a:fld>
           </a:p>
@@ -1280,7 +1253,7 @@
             <a:spLocks noGrp="1"/>
           </p:cNvSpPr>
           <p:nvPr>
-            <p:ph type="dt" idx="1"/>
+            <p:ph type="dt" idx="3"/>
           </p:nvPr>
         </p:nvSpPr>
         <p:spPr/>
@@ -1329,7 +1302,7 @@
         <p:spPr>
           <a:xfrm>
             <a:off x="1143000" y="841680"/>
-            <a:ext cx="6857640" cy="1790280"/>
+            <a:ext cx="6857280" cy="1789920"/>
           </a:xfrm>
           <a:prstGeom prst="rect">
             <a:avLst/>
@@ -1344,11 +1317,11 @@
             <a:noAutofit/>
           </a:bodyPr>
           <a:p>
-            <a:endParaRPr b="0" lang="en-US" sz="1800" spc="-1" strike="noStrike">
-              <a:solidFill>
-                <a:srgbClr val="000000"/>
-              </a:solidFill>
-              <a:latin typeface="Calibri"/>
+            <a:pPr algn="ctr">
+              <a:buNone/>
+            </a:pPr>
+            <a:endParaRPr b="0" lang="en-US" sz="4400" spc="-1" strike="noStrike">
+              <a:latin typeface="Arial"/>
             </a:endParaRPr>
           </a:p>
         </p:txBody>
@@ -1381,20 +1354,8 @@
             <a:normAutofit/>
           </a:bodyPr>
           <a:p>
-            <a:pPr>
-              <a:lnSpc>
-                <a:spcPct val="90000"/>
-              </a:lnSpc>
-              <a:spcBef>
-                <a:spcPts val="1417"/>
-              </a:spcBef>
-              <a:buNone/>
-            </a:pPr>
-            <a:endParaRPr b="0" lang="en-US" sz="2100" spc="-1" strike="noStrike">
-              <a:solidFill>
-                <a:srgbClr val="000000"/>
-              </a:solidFill>
-              <a:latin typeface="Calibri"/>
+            <a:endParaRPr b="0" lang="en-US" sz="3200" spc="-1" strike="noStrike">
+              <a:latin typeface="Arial"/>
             </a:endParaRPr>
           </a:p>
         </p:txBody>
@@ -1427,20 +1388,8 @@
             <a:normAutofit/>
           </a:bodyPr>
           <a:p>
-            <a:pPr>
-              <a:lnSpc>
-                <a:spcPct val="90000"/>
-              </a:lnSpc>
-              <a:spcBef>
-                <a:spcPts val="1417"/>
-              </a:spcBef>
-              <a:buNone/>
-            </a:pPr>
-            <a:endParaRPr b="0" lang="en-US" sz="2100" spc="-1" strike="noStrike">
-              <a:solidFill>
-                <a:srgbClr val="000000"/>
-              </a:solidFill>
-              <a:latin typeface="Calibri"/>
+            <a:endParaRPr b="0" lang="en-US" sz="3200" spc="-1" strike="noStrike">
+              <a:latin typeface="Arial"/>
             </a:endParaRPr>
           </a:p>
         </p:txBody>
@@ -1473,20 +1422,8 @@
             <a:normAutofit/>
           </a:bodyPr>
           <a:p>
-            <a:pPr>
-              <a:lnSpc>
-                <a:spcPct val="90000"/>
-              </a:lnSpc>
-              <a:spcBef>
-                <a:spcPts val="1417"/>
-              </a:spcBef>
-              <a:buNone/>
-            </a:pPr>
-            <a:endParaRPr b="0" lang="en-US" sz="2100" spc="-1" strike="noStrike">
-              <a:solidFill>
-                <a:srgbClr val="000000"/>
-              </a:solidFill>
-              <a:latin typeface="Calibri"/>
+            <a:endParaRPr b="0" lang="en-US" sz="3200" spc="-1" strike="noStrike">
+              <a:latin typeface="Arial"/>
             </a:endParaRPr>
           </a:p>
         </p:txBody>
@@ -1519,20 +1456,8 @@
             <a:normAutofit/>
           </a:bodyPr>
           <a:p>
-            <a:pPr>
-              <a:lnSpc>
-                <a:spcPct val="90000"/>
-              </a:lnSpc>
-              <a:spcBef>
-                <a:spcPts val="1417"/>
-              </a:spcBef>
-              <a:buNone/>
-            </a:pPr>
-            <a:endParaRPr b="0" lang="en-US" sz="2100" spc="-1" strike="noStrike">
-              <a:solidFill>
-                <a:srgbClr val="000000"/>
-              </a:solidFill>
-              <a:latin typeface="Calibri"/>
+            <a:endParaRPr b="0" lang="en-US" sz="3200" spc="-1" strike="noStrike">
+              <a:latin typeface="Arial"/>
             </a:endParaRPr>
           </a:p>
         </p:txBody>
@@ -1544,7 +1469,7 @@
             <a:spLocks noGrp="1"/>
           </p:cNvSpPr>
           <p:nvPr>
-            <p:ph type="ftr" idx="2"/>
+            <p:ph type="ftr" idx="1"/>
           </p:nvPr>
         </p:nvSpPr>
         <p:spPr/>
@@ -1564,14 +1489,14 @@
             <a:spLocks noGrp="1"/>
           </p:cNvSpPr>
           <p:nvPr>
-            <p:ph type="sldNum" idx="3"/>
+            <p:ph type="sldNum" idx="2"/>
           </p:nvPr>
         </p:nvSpPr>
         <p:spPr/>
         <p:txBody>
           <a:bodyPr/>
           <a:p>
-            <a:fld id="{87EB63C0-2E6E-4C7E-AC60-E026C2F145DC}" type="slidenum">
+            <a:fld id="{93D9801A-C3A8-4948-983C-958482DC18A2}" type="slidenum">
               <a:t>&lt;#&gt;</a:t>
             </a:fld>
           </a:p>
@@ -1584,7 +1509,7 @@
             <a:spLocks noGrp="1"/>
           </p:cNvSpPr>
           <p:nvPr>
-            <p:ph type="dt" idx="1"/>
+            <p:ph type="dt" idx="3"/>
           </p:nvPr>
         </p:nvSpPr>
         <p:spPr/>
@@ -1633,7 +1558,7 @@
         <p:spPr>
           <a:xfrm>
             <a:off x="1143000" y="841680"/>
-            <a:ext cx="6857640" cy="1790280"/>
+            <a:ext cx="6857280" cy="1789920"/>
           </a:xfrm>
           <a:prstGeom prst="rect">
             <a:avLst/>
@@ -1648,11 +1573,11 @@
             <a:noAutofit/>
           </a:bodyPr>
           <a:p>
-            <a:endParaRPr b="0" lang="en-US" sz="1800" spc="-1" strike="noStrike">
-              <a:solidFill>
-                <a:srgbClr val="000000"/>
-              </a:solidFill>
-              <a:latin typeface="Calibri"/>
+            <a:pPr algn="ctr">
+              <a:buNone/>
+            </a:pPr>
+            <a:endParaRPr b="0" lang="en-US" sz="4400" spc="-1" strike="noStrike">
+              <a:latin typeface="Arial"/>
             </a:endParaRPr>
           </a:p>
         </p:txBody>
@@ -1685,20 +1610,8 @@
             <a:normAutofit/>
           </a:bodyPr>
           <a:p>
-            <a:pPr>
-              <a:lnSpc>
-                <a:spcPct val="90000"/>
-              </a:lnSpc>
-              <a:spcBef>
-                <a:spcPts val="1417"/>
-              </a:spcBef>
-              <a:buNone/>
-            </a:pPr>
-            <a:endParaRPr b="0" lang="en-US" sz="2100" spc="-1" strike="noStrike">
-              <a:solidFill>
-                <a:srgbClr val="000000"/>
-              </a:solidFill>
-              <a:latin typeface="Calibri"/>
+            <a:endParaRPr b="0" lang="en-US" sz="3200" spc="-1" strike="noStrike">
+              <a:latin typeface="Arial"/>
             </a:endParaRPr>
           </a:p>
         </p:txBody>
@@ -1731,20 +1644,8 @@
             <a:normAutofit/>
           </a:bodyPr>
           <a:p>
-            <a:pPr>
-              <a:lnSpc>
-                <a:spcPct val="90000"/>
-              </a:lnSpc>
-              <a:spcBef>
-                <a:spcPts val="1417"/>
-              </a:spcBef>
-              <a:buNone/>
-            </a:pPr>
-            <a:endParaRPr b="0" lang="en-US" sz="2100" spc="-1" strike="noStrike">
-              <a:solidFill>
-                <a:srgbClr val="000000"/>
-              </a:solidFill>
-              <a:latin typeface="Calibri"/>
+            <a:endParaRPr b="0" lang="en-US" sz="3200" spc="-1" strike="noStrike">
+              <a:latin typeface="Arial"/>
             </a:endParaRPr>
           </a:p>
         </p:txBody>
@@ -1777,20 +1678,8 @@
             <a:normAutofit/>
           </a:bodyPr>
           <a:p>
-            <a:pPr>
-              <a:lnSpc>
-                <a:spcPct val="90000"/>
-              </a:lnSpc>
-              <a:spcBef>
-                <a:spcPts val="1417"/>
-              </a:spcBef>
-              <a:buNone/>
-            </a:pPr>
-            <a:endParaRPr b="0" lang="en-US" sz="2100" spc="-1" strike="noStrike">
-              <a:solidFill>
-                <a:srgbClr val="000000"/>
-              </a:solidFill>
-              <a:latin typeface="Calibri"/>
+            <a:endParaRPr b="0" lang="en-US" sz="3200" spc="-1" strike="noStrike">
+              <a:latin typeface="Arial"/>
             </a:endParaRPr>
           </a:p>
         </p:txBody>
@@ -1823,20 +1712,8 @@
             <a:normAutofit/>
           </a:bodyPr>
           <a:p>
-            <a:pPr>
-              <a:lnSpc>
-                <a:spcPct val="90000"/>
-              </a:lnSpc>
-              <a:spcBef>
-                <a:spcPts val="1417"/>
-              </a:spcBef>
-              <a:buNone/>
-            </a:pPr>
-            <a:endParaRPr b="0" lang="en-US" sz="2100" spc="-1" strike="noStrike">
-              <a:solidFill>
-                <a:srgbClr val="000000"/>
-              </a:solidFill>
-              <a:latin typeface="Calibri"/>
+            <a:endParaRPr b="0" lang="en-US" sz="3200" spc="-1" strike="noStrike">
+              <a:latin typeface="Arial"/>
             </a:endParaRPr>
           </a:p>
         </p:txBody>
@@ -1869,20 +1746,8 @@
             <a:normAutofit/>
           </a:bodyPr>
           <a:p>
-            <a:pPr>
-              <a:lnSpc>
-                <a:spcPct val="90000"/>
-              </a:lnSpc>
-              <a:spcBef>
-                <a:spcPts val="1417"/>
-              </a:spcBef>
-              <a:buNone/>
-            </a:pPr>
-            <a:endParaRPr b="0" lang="en-US" sz="2100" spc="-1" strike="noStrike">
-              <a:solidFill>
-                <a:srgbClr val="000000"/>
-              </a:solidFill>
-              <a:latin typeface="Calibri"/>
+            <a:endParaRPr b="0" lang="en-US" sz="3200" spc="-1" strike="noStrike">
+              <a:latin typeface="Arial"/>
             </a:endParaRPr>
           </a:p>
         </p:txBody>
@@ -1915,20 +1780,8 @@
             <a:normAutofit/>
           </a:bodyPr>
           <a:p>
-            <a:pPr>
-              <a:lnSpc>
-                <a:spcPct val="90000"/>
-              </a:lnSpc>
-              <a:spcBef>
-                <a:spcPts val="1417"/>
-              </a:spcBef>
-              <a:buNone/>
-            </a:pPr>
-            <a:endParaRPr b="0" lang="en-US" sz="2100" spc="-1" strike="noStrike">
-              <a:solidFill>
-                <a:srgbClr val="000000"/>
-              </a:solidFill>
-              <a:latin typeface="Calibri"/>
+            <a:endParaRPr b="0" lang="en-US" sz="3200" spc="-1" strike="noStrike">
+              <a:latin typeface="Arial"/>
             </a:endParaRPr>
           </a:p>
         </p:txBody>
@@ -1940,7 +1793,7 @@
             <a:spLocks noGrp="1"/>
           </p:cNvSpPr>
           <p:nvPr>
-            <p:ph type="ftr" idx="2"/>
+            <p:ph type="ftr" idx="1"/>
           </p:nvPr>
         </p:nvSpPr>
         <p:spPr/>
@@ -1960,14 +1813,14 @@
             <a:spLocks noGrp="1"/>
           </p:cNvSpPr>
           <p:nvPr>
-            <p:ph type="sldNum" idx="3"/>
+            <p:ph type="sldNum" idx="2"/>
           </p:nvPr>
         </p:nvSpPr>
         <p:spPr/>
         <p:txBody>
           <a:bodyPr/>
           <a:p>
-            <a:fld id="{0737C1F5-B9E5-4C09-9C3B-E69EA3433F20}" type="slidenum">
+            <a:fld id="{C477DCAC-413D-4DED-BF7A-5C43F3E8587A}" type="slidenum">
               <a:t>&lt;#&gt;</a:t>
             </a:fld>
           </a:p>
@@ -1980,7 +1833,7 @@
             <a:spLocks noGrp="1"/>
           </p:cNvSpPr>
           <p:nvPr>
-            <p:ph type="dt" idx="1"/>
+            <p:ph type="dt" idx="3"/>
           </p:nvPr>
         </p:nvSpPr>
         <p:spPr/>
@@ -2029,7 +1882,7 @@
         <p:spPr>
           <a:xfrm>
             <a:off x="1143000" y="841680"/>
-            <a:ext cx="6857640" cy="1790280"/>
+            <a:ext cx="6857280" cy="1789920"/>
           </a:xfrm>
           <a:prstGeom prst="rect">
             <a:avLst/>
@@ -2044,11 +1897,11 @@
             <a:noAutofit/>
           </a:bodyPr>
           <a:p>
-            <a:endParaRPr b="0" lang="en-US" sz="1800" spc="-1" strike="noStrike">
-              <a:solidFill>
-                <a:srgbClr val="000000"/>
-              </a:solidFill>
-              <a:latin typeface="Calibri"/>
+            <a:pPr algn="ctr">
+              <a:buNone/>
+            </a:pPr>
+            <a:endParaRPr b="0" lang="en-US" sz="4400" spc="-1" strike="noStrike">
+              <a:latin typeface="Arial"/>
             </a:endParaRPr>
           </a:p>
         </p:txBody>
@@ -2097,7 +1950,7 @@
             <a:spLocks noGrp="1"/>
           </p:cNvSpPr>
           <p:nvPr>
-            <p:ph type="ftr" idx="2"/>
+            <p:ph type="ftr" idx="1"/>
           </p:nvPr>
         </p:nvSpPr>
         <p:spPr/>
@@ -2117,14 +1970,14 @@
             <a:spLocks noGrp="1"/>
           </p:cNvSpPr>
           <p:nvPr>
-            <p:ph type="sldNum" idx="3"/>
+            <p:ph type="sldNum" idx="2"/>
           </p:nvPr>
         </p:nvSpPr>
         <p:spPr/>
         <p:txBody>
           <a:bodyPr/>
           <a:p>
-            <a:fld id="{D00D30D8-51A1-4E1D-9124-95FC6B83FF0F}" type="slidenum">
+            <a:fld id="{B4CCF9AA-3434-4F98-BECB-3D767B84953B}" type="slidenum">
               <a:t>&lt;#&gt;</a:t>
             </a:fld>
           </a:p>
@@ -2137,7 +1990,7 @@
             <a:spLocks noGrp="1"/>
           </p:cNvSpPr>
           <p:nvPr>
-            <p:ph type="dt" idx="1"/>
+            <p:ph type="dt" idx="3"/>
           </p:nvPr>
         </p:nvSpPr>
         <p:spPr/>
@@ -2186,7 +2039,7 @@
         <p:spPr>
           <a:xfrm>
             <a:off x="1143000" y="841680"/>
-            <a:ext cx="6857640" cy="1790280"/>
+            <a:ext cx="6857280" cy="1789920"/>
           </a:xfrm>
           <a:prstGeom prst="rect">
             <a:avLst/>
@@ -2201,11 +2054,11 @@
             <a:noAutofit/>
           </a:bodyPr>
           <a:p>
-            <a:endParaRPr b="0" lang="en-US" sz="1800" spc="-1" strike="noStrike">
-              <a:solidFill>
-                <a:srgbClr val="000000"/>
-              </a:solidFill>
-              <a:latin typeface="Calibri"/>
+            <a:pPr algn="ctr">
+              <a:buNone/>
+            </a:pPr>
+            <a:endParaRPr b="0" lang="en-US" sz="4400" spc="-1" strike="noStrike">
+              <a:latin typeface="Arial"/>
             </a:endParaRPr>
           </a:p>
         </p:txBody>
@@ -2238,20 +2091,8 @@
             <a:normAutofit/>
           </a:bodyPr>
           <a:p>
-            <a:pPr>
-              <a:lnSpc>
-                <a:spcPct val="90000"/>
-              </a:lnSpc>
-              <a:spcBef>
-                <a:spcPts val="1417"/>
-              </a:spcBef>
-              <a:buNone/>
-            </a:pPr>
-            <a:endParaRPr b="0" lang="en-US" sz="2100" spc="-1" strike="noStrike">
-              <a:solidFill>
-                <a:srgbClr val="000000"/>
-              </a:solidFill>
-              <a:latin typeface="Calibri"/>
+            <a:endParaRPr b="0" lang="en-US" sz="3200" spc="-1" strike="noStrike">
+              <a:latin typeface="Arial"/>
             </a:endParaRPr>
           </a:p>
         </p:txBody>
@@ -2263,7 +2104,7 @@
             <a:spLocks noGrp="1"/>
           </p:cNvSpPr>
           <p:nvPr>
-            <p:ph type="ftr" idx="2"/>
+            <p:ph type="ftr" idx="1"/>
           </p:nvPr>
         </p:nvSpPr>
         <p:spPr/>
@@ -2283,14 +2124,14 @@
             <a:spLocks noGrp="1"/>
           </p:cNvSpPr>
           <p:nvPr>
-            <p:ph type="sldNum" idx="3"/>
+            <p:ph type="sldNum" idx="2"/>
           </p:nvPr>
         </p:nvSpPr>
         <p:spPr/>
         <p:txBody>
           <a:bodyPr/>
           <a:p>
-            <a:fld id="{CD9F29BB-6419-4E3C-9F9E-F6FF0B75B2F8}" type="slidenum">
+            <a:fld id="{2B5B797E-F430-4613-986B-3A320D5FBD9B}" type="slidenum">
               <a:t>&lt;#&gt;</a:t>
             </a:fld>
           </a:p>
@@ -2303,7 +2144,7 @@
             <a:spLocks noGrp="1"/>
           </p:cNvSpPr>
           <p:nvPr>
-            <p:ph type="dt" idx="1"/>
+            <p:ph type="dt" idx="3"/>
           </p:nvPr>
         </p:nvSpPr>
         <p:spPr/>
@@ -2352,7 +2193,7 @@
         <p:spPr>
           <a:xfrm>
             <a:off x="1143000" y="841680"/>
-            <a:ext cx="6857640" cy="1790280"/>
+            <a:ext cx="6857280" cy="1789920"/>
           </a:xfrm>
           <a:prstGeom prst="rect">
             <a:avLst/>
@@ -2367,11 +2208,11 @@
             <a:noAutofit/>
           </a:bodyPr>
           <a:p>
-            <a:endParaRPr b="0" lang="en-US" sz="1800" spc="-1" strike="noStrike">
-              <a:solidFill>
-                <a:srgbClr val="000000"/>
-              </a:solidFill>
-              <a:latin typeface="Calibri"/>
+            <a:pPr algn="ctr">
+              <a:buNone/>
+            </a:pPr>
+            <a:endParaRPr b="0" lang="en-US" sz="4400" spc="-1" strike="noStrike">
+              <a:latin typeface="Arial"/>
             </a:endParaRPr>
           </a:p>
         </p:txBody>
@@ -2404,20 +2245,8 @@
             <a:normAutofit/>
           </a:bodyPr>
           <a:p>
-            <a:pPr>
-              <a:lnSpc>
-                <a:spcPct val="90000"/>
-              </a:lnSpc>
-              <a:spcBef>
-                <a:spcPts val="1417"/>
-              </a:spcBef>
-              <a:buNone/>
-            </a:pPr>
-            <a:endParaRPr b="0" lang="en-US" sz="2100" spc="-1" strike="noStrike">
-              <a:solidFill>
-                <a:srgbClr val="000000"/>
-              </a:solidFill>
-              <a:latin typeface="Calibri"/>
+            <a:endParaRPr b="0" lang="en-US" sz="3200" spc="-1" strike="noStrike">
+              <a:latin typeface="Arial"/>
             </a:endParaRPr>
           </a:p>
         </p:txBody>
@@ -2450,20 +2279,8 @@
             <a:normAutofit/>
           </a:bodyPr>
           <a:p>
-            <a:pPr>
-              <a:lnSpc>
-                <a:spcPct val="90000"/>
-              </a:lnSpc>
-              <a:spcBef>
-                <a:spcPts val="1417"/>
-              </a:spcBef>
-              <a:buNone/>
-            </a:pPr>
-            <a:endParaRPr b="0" lang="en-US" sz="2100" spc="-1" strike="noStrike">
-              <a:solidFill>
-                <a:srgbClr val="000000"/>
-              </a:solidFill>
-              <a:latin typeface="Calibri"/>
+            <a:endParaRPr b="0" lang="en-US" sz="3200" spc="-1" strike="noStrike">
+              <a:latin typeface="Arial"/>
             </a:endParaRPr>
           </a:p>
         </p:txBody>
@@ -2475,7 +2292,7 @@
             <a:spLocks noGrp="1"/>
           </p:cNvSpPr>
           <p:nvPr>
-            <p:ph type="ftr" idx="2"/>
+            <p:ph type="ftr" idx="1"/>
           </p:nvPr>
         </p:nvSpPr>
         <p:spPr/>
@@ -2495,14 +2312,14 @@
             <a:spLocks noGrp="1"/>
           </p:cNvSpPr>
           <p:nvPr>
-            <p:ph type="sldNum" idx="3"/>
+            <p:ph type="sldNum" idx="2"/>
           </p:nvPr>
         </p:nvSpPr>
         <p:spPr/>
         <p:txBody>
           <a:bodyPr/>
           <a:p>
-            <a:fld id="{3375450F-BC54-4338-8799-F2DE1F90F942}" type="slidenum">
+            <a:fld id="{817AE7A6-0295-4B77-B4B1-BDA3A1478C1B}" type="slidenum">
               <a:t>&lt;#&gt;</a:t>
             </a:fld>
           </a:p>
@@ -2515,7 +2332,7 @@
             <a:spLocks noGrp="1"/>
           </p:cNvSpPr>
           <p:nvPr>
-            <p:ph type="dt" idx="1"/>
+            <p:ph type="dt" idx="3"/>
           </p:nvPr>
         </p:nvSpPr>
         <p:spPr/>
@@ -2564,7 +2381,7 @@
         <p:spPr>
           <a:xfrm>
             <a:off x="1143000" y="841680"/>
-            <a:ext cx="6857640" cy="1790280"/>
+            <a:ext cx="6857280" cy="1789920"/>
           </a:xfrm>
           <a:prstGeom prst="rect">
             <a:avLst/>
@@ -2579,11 +2396,11 @@
             <a:noAutofit/>
           </a:bodyPr>
           <a:p>
-            <a:endParaRPr b="0" lang="en-US" sz="1800" spc="-1" strike="noStrike">
-              <a:solidFill>
-                <a:srgbClr val="000000"/>
-              </a:solidFill>
-              <a:latin typeface="Calibri"/>
+            <a:pPr algn="ctr">
+              <a:buNone/>
+            </a:pPr>
+            <a:endParaRPr b="0" lang="en-US" sz="4400" spc="-1" strike="noStrike">
+              <a:latin typeface="Arial"/>
             </a:endParaRPr>
           </a:p>
         </p:txBody>
@@ -2595,7 +2412,7 @@
             <a:spLocks noGrp="1"/>
           </p:cNvSpPr>
           <p:nvPr>
-            <p:ph type="ftr" idx="2"/>
+            <p:ph type="ftr" idx="1"/>
           </p:nvPr>
         </p:nvSpPr>
         <p:spPr/>
@@ -2615,14 +2432,14 @@
             <a:spLocks noGrp="1"/>
           </p:cNvSpPr>
           <p:nvPr>
-            <p:ph type="sldNum" idx="3"/>
+            <p:ph type="sldNum" idx="2"/>
           </p:nvPr>
         </p:nvSpPr>
         <p:spPr/>
         <p:txBody>
           <a:bodyPr/>
           <a:p>
-            <a:fld id="{9C77F1F9-74DF-4F2F-BA5D-60688820F7AD}" type="slidenum">
+            <a:fld id="{F2A33D33-9A1A-496F-9002-5DEED9CF8E14}" type="slidenum">
               <a:t>&lt;#&gt;</a:t>
             </a:fld>
           </a:p>
@@ -2635,7 +2452,7 @@
             <a:spLocks noGrp="1"/>
           </p:cNvSpPr>
           <p:nvPr>
-            <p:ph type="dt" idx="1"/>
+            <p:ph type="dt" idx="3"/>
           </p:nvPr>
         </p:nvSpPr>
         <p:spPr/>
@@ -2684,7 +2501,7 @@
         <p:spPr>
           <a:xfrm>
             <a:off x="1143000" y="841680"/>
-            <a:ext cx="6857640" cy="8299800"/>
+            <a:ext cx="6857280" cy="8298360"/>
           </a:xfrm>
           <a:prstGeom prst="rect">
             <a:avLst/>
@@ -2715,7 +2532,7 @@
             <a:spLocks noGrp="1"/>
           </p:cNvSpPr>
           <p:nvPr>
-            <p:ph type="ftr" idx="2"/>
+            <p:ph type="ftr" idx="1"/>
           </p:nvPr>
         </p:nvSpPr>
         <p:spPr/>
@@ -2735,14 +2552,14 @@
             <a:spLocks noGrp="1"/>
           </p:cNvSpPr>
           <p:nvPr>
-            <p:ph type="sldNum" idx="3"/>
+            <p:ph type="sldNum" idx="2"/>
           </p:nvPr>
         </p:nvSpPr>
         <p:spPr/>
         <p:txBody>
           <a:bodyPr/>
           <a:p>
-            <a:fld id="{4CD6657E-07B1-410F-9813-EFFA2B297854}" type="slidenum">
+            <a:fld id="{3F788CD2-1903-44D4-9549-BE3C12DF3290}" type="slidenum">
               <a:t>&lt;#&gt;</a:t>
             </a:fld>
           </a:p>
@@ -2755,7 +2572,7 @@
             <a:spLocks noGrp="1"/>
           </p:cNvSpPr>
           <p:nvPr>
-            <p:ph type="dt" idx="1"/>
+            <p:ph type="dt" idx="3"/>
           </p:nvPr>
         </p:nvSpPr>
         <p:spPr/>
@@ -2804,7 +2621,7 @@
         <p:spPr>
           <a:xfrm>
             <a:off x="1143000" y="841680"/>
-            <a:ext cx="6857640" cy="1790280"/>
+            <a:ext cx="6857280" cy="1789920"/>
           </a:xfrm>
           <a:prstGeom prst="rect">
             <a:avLst/>
@@ -2819,11 +2636,11 @@
             <a:noAutofit/>
           </a:bodyPr>
           <a:p>
-            <a:endParaRPr b="0" lang="en-US" sz="1800" spc="-1" strike="noStrike">
-              <a:solidFill>
-                <a:srgbClr val="000000"/>
-              </a:solidFill>
-              <a:latin typeface="Calibri"/>
+            <a:pPr algn="ctr">
+              <a:buNone/>
+            </a:pPr>
+            <a:endParaRPr b="0" lang="en-US" sz="4400" spc="-1" strike="noStrike">
+              <a:latin typeface="Arial"/>
             </a:endParaRPr>
           </a:p>
         </p:txBody>
@@ -2856,20 +2673,8 @@
             <a:normAutofit/>
           </a:bodyPr>
           <a:p>
-            <a:pPr>
-              <a:lnSpc>
-                <a:spcPct val="90000"/>
-              </a:lnSpc>
-              <a:spcBef>
-                <a:spcPts val="1417"/>
-              </a:spcBef>
-              <a:buNone/>
-            </a:pPr>
-            <a:endParaRPr b="0" lang="en-US" sz="2100" spc="-1" strike="noStrike">
-              <a:solidFill>
-                <a:srgbClr val="000000"/>
-              </a:solidFill>
-              <a:latin typeface="Calibri"/>
+            <a:endParaRPr b="0" lang="en-US" sz="3200" spc="-1" strike="noStrike">
+              <a:latin typeface="Arial"/>
             </a:endParaRPr>
           </a:p>
         </p:txBody>
@@ -2902,20 +2707,8 @@
             <a:normAutofit/>
           </a:bodyPr>
           <a:p>
-            <a:pPr>
-              <a:lnSpc>
-                <a:spcPct val="90000"/>
-              </a:lnSpc>
-              <a:spcBef>
-                <a:spcPts val="1417"/>
-              </a:spcBef>
-              <a:buNone/>
-            </a:pPr>
-            <a:endParaRPr b="0" lang="en-US" sz="2100" spc="-1" strike="noStrike">
-              <a:solidFill>
-                <a:srgbClr val="000000"/>
-              </a:solidFill>
-              <a:latin typeface="Calibri"/>
+            <a:endParaRPr b="0" lang="en-US" sz="3200" spc="-1" strike="noStrike">
+              <a:latin typeface="Arial"/>
             </a:endParaRPr>
           </a:p>
         </p:txBody>
@@ -2948,20 +2741,8 @@
             <a:normAutofit/>
           </a:bodyPr>
           <a:p>
-            <a:pPr>
-              <a:lnSpc>
-                <a:spcPct val="90000"/>
-              </a:lnSpc>
-              <a:spcBef>
-                <a:spcPts val="1417"/>
-              </a:spcBef>
-              <a:buNone/>
-            </a:pPr>
-            <a:endParaRPr b="0" lang="en-US" sz="2100" spc="-1" strike="noStrike">
-              <a:solidFill>
-                <a:srgbClr val="000000"/>
-              </a:solidFill>
-              <a:latin typeface="Calibri"/>
+            <a:endParaRPr b="0" lang="en-US" sz="3200" spc="-1" strike="noStrike">
+              <a:latin typeface="Arial"/>
             </a:endParaRPr>
           </a:p>
         </p:txBody>
@@ -2973,7 +2754,7 @@
             <a:spLocks noGrp="1"/>
           </p:cNvSpPr>
           <p:nvPr>
-            <p:ph type="ftr" idx="2"/>
+            <p:ph type="ftr" idx="1"/>
           </p:nvPr>
         </p:nvSpPr>
         <p:spPr/>
@@ -2993,14 +2774,14 @@
             <a:spLocks noGrp="1"/>
           </p:cNvSpPr>
           <p:nvPr>
-            <p:ph type="sldNum" idx="3"/>
+            <p:ph type="sldNum" idx="2"/>
           </p:nvPr>
         </p:nvSpPr>
         <p:spPr/>
         <p:txBody>
           <a:bodyPr/>
           <a:p>
-            <a:fld id="{7F966EF6-AABF-40EC-AA8C-D96CDD13A317}" type="slidenum">
+            <a:fld id="{DA7BAEF9-408F-4045-B535-2D56F700D885}" type="slidenum">
               <a:t>&lt;#&gt;</a:t>
             </a:fld>
           </a:p>
@@ -3013,7 +2794,7 @@
             <a:spLocks noGrp="1"/>
           </p:cNvSpPr>
           <p:nvPr>
-            <p:ph type="dt" idx="1"/>
+            <p:ph type="dt" idx="3"/>
           </p:nvPr>
         </p:nvSpPr>
         <p:spPr/>
@@ -3062,7 +2843,7 @@
         <p:spPr>
           <a:xfrm>
             <a:off x="1143000" y="841680"/>
-            <a:ext cx="6857640" cy="1790280"/>
+            <a:ext cx="6857280" cy="1789920"/>
           </a:xfrm>
           <a:prstGeom prst="rect">
             <a:avLst/>
@@ -3077,11 +2858,11 @@
             <a:noAutofit/>
           </a:bodyPr>
           <a:p>
-            <a:endParaRPr b="0" lang="en-US" sz="1800" spc="-1" strike="noStrike">
-              <a:solidFill>
-                <a:srgbClr val="000000"/>
-              </a:solidFill>
-              <a:latin typeface="Calibri"/>
+            <a:pPr algn="ctr">
+              <a:buNone/>
+            </a:pPr>
+            <a:endParaRPr b="0" lang="en-US" sz="4400" spc="-1" strike="noStrike">
+              <a:latin typeface="Arial"/>
             </a:endParaRPr>
           </a:p>
         </p:txBody>
@@ -3114,20 +2895,8 @@
             <a:normAutofit/>
           </a:bodyPr>
           <a:p>
-            <a:pPr>
-              <a:lnSpc>
-                <a:spcPct val="90000"/>
-              </a:lnSpc>
-              <a:spcBef>
-                <a:spcPts val="1417"/>
-              </a:spcBef>
-              <a:buNone/>
-            </a:pPr>
-            <a:endParaRPr b="0" lang="en-US" sz="2100" spc="-1" strike="noStrike">
-              <a:solidFill>
-                <a:srgbClr val="000000"/>
-              </a:solidFill>
-              <a:latin typeface="Calibri"/>
+            <a:endParaRPr b="0" lang="en-US" sz="3200" spc="-1" strike="noStrike">
+              <a:latin typeface="Arial"/>
             </a:endParaRPr>
           </a:p>
         </p:txBody>
@@ -3160,20 +2929,8 @@
             <a:normAutofit/>
           </a:bodyPr>
           <a:p>
-            <a:pPr>
-              <a:lnSpc>
-                <a:spcPct val="90000"/>
-              </a:lnSpc>
-              <a:spcBef>
-                <a:spcPts val="1417"/>
-              </a:spcBef>
-              <a:buNone/>
-            </a:pPr>
-            <a:endParaRPr b="0" lang="en-US" sz="2100" spc="-1" strike="noStrike">
-              <a:solidFill>
-                <a:srgbClr val="000000"/>
-              </a:solidFill>
-              <a:latin typeface="Calibri"/>
+            <a:endParaRPr b="0" lang="en-US" sz="3200" spc="-1" strike="noStrike">
+              <a:latin typeface="Arial"/>
             </a:endParaRPr>
           </a:p>
         </p:txBody>
@@ -3206,20 +2963,8 @@
             <a:normAutofit/>
           </a:bodyPr>
           <a:p>
-            <a:pPr>
-              <a:lnSpc>
-                <a:spcPct val="90000"/>
-              </a:lnSpc>
-              <a:spcBef>
-                <a:spcPts val="1417"/>
-              </a:spcBef>
-              <a:buNone/>
-            </a:pPr>
-            <a:endParaRPr b="0" lang="en-US" sz="2100" spc="-1" strike="noStrike">
-              <a:solidFill>
-                <a:srgbClr val="000000"/>
-              </a:solidFill>
-              <a:latin typeface="Calibri"/>
+            <a:endParaRPr b="0" lang="en-US" sz="3200" spc="-1" strike="noStrike">
+              <a:latin typeface="Arial"/>
             </a:endParaRPr>
           </a:p>
         </p:txBody>
@@ -3231,7 +2976,7 @@
             <a:spLocks noGrp="1"/>
           </p:cNvSpPr>
           <p:nvPr>
-            <p:ph type="ftr" idx="2"/>
+            <p:ph type="ftr" idx="1"/>
           </p:nvPr>
         </p:nvSpPr>
         <p:spPr/>
@@ -3251,14 +2996,14 @@
             <a:spLocks noGrp="1"/>
           </p:cNvSpPr>
           <p:nvPr>
-            <p:ph type="sldNum" idx="3"/>
+            <p:ph type="sldNum" idx="2"/>
           </p:nvPr>
         </p:nvSpPr>
         <p:spPr/>
         <p:txBody>
           <a:bodyPr/>
           <a:p>
-            <a:fld id="{45E4250D-2F60-4125-97A1-741681F6C69B}" type="slidenum">
+            <a:fld id="{E6608231-6C6A-4AF8-A7D7-3E9AFD5242DA}" type="slidenum">
               <a:t>&lt;#&gt;</a:t>
             </a:fld>
           </a:p>
@@ -3271,7 +3016,7 @@
             <a:spLocks noGrp="1"/>
           </p:cNvSpPr>
           <p:nvPr>
-            <p:ph type="dt" idx="1"/>
+            <p:ph type="dt" idx="3"/>
           </p:nvPr>
         </p:nvSpPr>
         <p:spPr/>
@@ -3320,7 +3065,7 @@
         <p:spPr>
           <a:xfrm>
             <a:off x="1143000" y="841680"/>
-            <a:ext cx="6857640" cy="1790280"/>
+            <a:ext cx="6857280" cy="1789920"/>
           </a:xfrm>
           <a:prstGeom prst="rect">
             <a:avLst/>
@@ -3335,11 +3080,11 @@
             <a:noAutofit/>
           </a:bodyPr>
           <a:p>
-            <a:endParaRPr b="0" lang="en-US" sz="1800" spc="-1" strike="noStrike">
-              <a:solidFill>
-                <a:srgbClr val="000000"/>
-              </a:solidFill>
-              <a:latin typeface="Calibri"/>
+            <a:pPr algn="ctr">
+              <a:buNone/>
+            </a:pPr>
+            <a:endParaRPr b="0" lang="en-US" sz="4400" spc="-1" strike="noStrike">
+              <a:latin typeface="Arial"/>
             </a:endParaRPr>
           </a:p>
         </p:txBody>
@@ -3372,20 +3117,8 @@
             <a:normAutofit/>
           </a:bodyPr>
           <a:p>
-            <a:pPr>
-              <a:lnSpc>
-                <a:spcPct val="90000"/>
-              </a:lnSpc>
-              <a:spcBef>
-                <a:spcPts val="1417"/>
-              </a:spcBef>
-              <a:buNone/>
-            </a:pPr>
-            <a:endParaRPr b="0" lang="en-US" sz="2100" spc="-1" strike="noStrike">
-              <a:solidFill>
-                <a:srgbClr val="000000"/>
-              </a:solidFill>
-              <a:latin typeface="Calibri"/>
+            <a:endParaRPr b="0" lang="en-US" sz="3200" spc="-1" strike="noStrike">
+              <a:latin typeface="Arial"/>
             </a:endParaRPr>
           </a:p>
         </p:txBody>
@@ -3418,20 +3151,8 @@
             <a:normAutofit/>
           </a:bodyPr>
           <a:p>
-            <a:pPr>
-              <a:lnSpc>
-                <a:spcPct val="90000"/>
-              </a:lnSpc>
-              <a:spcBef>
-                <a:spcPts val="1417"/>
-              </a:spcBef>
-              <a:buNone/>
-            </a:pPr>
-            <a:endParaRPr b="0" lang="en-US" sz="2100" spc="-1" strike="noStrike">
-              <a:solidFill>
-                <a:srgbClr val="000000"/>
-              </a:solidFill>
-              <a:latin typeface="Calibri"/>
+            <a:endParaRPr b="0" lang="en-US" sz="3200" spc="-1" strike="noStrike">
+              <a:latin typeface="Arial"/>
             </a:endParaRPr>
           </a:p>
         </p:txBody>
@@ -3464,20 +3185,8 @@
             <a:normAutofit/>
           </a:bodyPr>
           <a:p>
-            <a:pPr>
-              <a:lnSpc>
-                <a:spcPct val="90000"/>
-              </a:lnSpc>
-              <a:spcBef>
-                <a:spcPts val="1417"/>
-              </a:spcBef>
-              <a:buNone/>
-            </a:pPr>
-            <a:endParaRPr b="0" lang="en-US" sz="2100" spc="-1" strike="noStrike">
-              <a:solidFill>
-                <a:srgbClr val="000000"/>
-              </a:solidFill>
-              <a:latin typeface="Calibri"/>
+            <a:endParaRPr b="0" lang="en-US" sz="3200" spc="-1" strike="noStrike">
+              <a:latin typeface="Arial"/>
             </a:endParaRPr>
           </a:p>
         </p:txBody>
@@ -3489,7 +3198,7 @@
             <a:spLocks noGrp="1"/>
           </p:cNvSpPr>
           <p:nvPr>
-            <p:ph type="ftr" idx="2"/>
+            <p:ph type="ftr" idx="1"/>
           </p:nvPr>
         </p:nvSpPr>
         <p:spPr/>
@@ -3509,14 +3218,14 @@
             <a:spLocks noGrp="1"/>
           </p:cNvSpPr>
           <p:nvPr>
-            <p:ph type="sldNum" idx="3"/>
+            <p:ph type="sldNum" idx="2"/>
           </p:nvPr>
         </p:nvSpPr>
         <p:spPr/>
         <p:txBody>
           <a:bodyPr/>
           <a:p>
-            <a:fld id="{07ABD2BE-1050-474B-9286-C9C2B1F9C965}" type="slidenum">
+            <a:fld id="{983446C5-650F-47E2-A57D-B7C2753B897B}" type="slidenum">
               <a:t>&lt;#&gt;</a:t>
             </a:fld>
           </a:p>
@@ -3529,7 +3238,7 @@
             <a:spLocks noGrp="1"/>
           </p:cNvSpPr>
           <p:nvPr>
-            <p:ph type="dt" idx="1"/>
+            <p:ph type="dt" idx="3"/>
           </p:nvPr>
         </p:nvSpPr>
         <p:spPr/>
@@ -3585,41 +3294,29 @@
         <p:spPr>
           <a:xfrm>
             <a:off x="1143000" y="841680"/>
-            <a:ext cx="6857640" cy="1790280"/>
-          </a:xfrm>
-          <a:prstGeom prst="rect">
-            <a:avLst/>
-          </a:prstGeom>
-          <a:noFill/>
-          <a:ln w="0">
-            <a:noFill/>
-          </a:ln>
-        </p:spPr>
-        <p:txBody>
-          <a:bodyPr anchor="b">
-            <a:noAutofit/>
-          </a:bodyPr>
-          <a:p>
-            <a:pPr algn="ctr">
-              <a:lnSpc>
-                <a:spcPct val="90000"/>
-              </a:lnSpc>
-              <a:buNone/>
-            </a:pPr>
-            <a:r>
-              <a:rPr b="0" lang="ru-RU" sz="4500" spc="-1" strike="noStrike">
-                <a:solidFill>
-                  <a:srgbClr val="000000"/>
-                </a:solidFill>
-                <a:latin typeface="Calibri Light"/>
-              </a:rPr>
-              <a:t>Образец заголовка</a:t>
-            </a:r>
-            <a:endParaRPr b="0" lang="en-US" sz="4500" spc="-1" strike="noStrike">
-              <a:solidFill>
-                <a:srgbClr val="000000"/>
-              </a:solidFill>
-              <a:latin typeface="Calibri"/>
+            <a:ext cx="6857280" cy="1789920"/>
+          </a:xfrm>
+          <a:prstGeom prst="rect">
+            <a:avLst/>
+          </a:prstGeom>
+          <a:noFill/>
+          <a:ln w="0">
+            <a:noFill/>
+          </a:ln>
+        </p:spPr>
+        <p:txBody>
+          <a:bodyPr lIns="0" rIns="0" tIns="0" bIns="0" anchor="ctr">
+            <a:noAutofit/>
+          </a:bodyPr>
+          <a:p>
+            <a:r>
+              <a:rPr b="0" lang="en-US" sz="1800" spc="-1" strike="noStrike">
+                <a:latin typeface="Arial"/>
+              </a:rPr>
+              <a:t>Click to edit the title text format</a:t>
+            </a:r>
+            <a:endParaRPr b="0" lang="en-US" sz="1800" spc="-1" strike="noStrike">
+              <a:latin typeface="Arial"/>
             </a:endParaRPr>
           </a:p>
         </p:txBody>
@@ -3631,57 +3328,51 @@
             <a:spLocks noGrp="1"/>
           </p:cNvSpPr>
           <p:nvPr>
-            <p:ph type="dt" idx="1"/>
+            <p:ph type="ftr" idx="1"/>
           </p:nvPr>
         </p:nvSpPr>
         <p:spPr>
           <a:xfrm>
-            <a:off x="628560" y="4767120"/>
-            <a:ext cx="2057040" cy="273600"/>
-          </a:xfrm>
-          <a:prstGeom prst="rect">
-            <a:avLst/>
-          </a:prstGeom>
-          <a:noFill/>
-          <a:ln w="0">
-            <a:noFill/>
-          </a:ln>
-        </p:spPr>
-        <p:txBody>
-          <a:bodyPr anchor="ctr">
+            <a:off x="3029040" y="4767120"/>
+            <a:ext cx="3085560" cy="273240"/>
+          </a:xfrm>
+          <a:prstGeom prst="rect">
+            <a:avLst/>
+          </a:prstGeom>
+          <a:noFill/>
+          <a:ln w="0">
+            <a:noFill/>
+          </a:ln>
+        </p:spPr>
+        <p:txBody>
+          <a:bodyPr lIns="90000" rIns="90000" tIns="45000" bIns="45000" anchor="ctr">
             <a:noAutofit/>
           </a:bodyPr>
           <a:lstStyle>
-            <a:lvl1pPr>
+            <a:lvl1pPr algn="ctr">
               <a:lnSpc>
                 <a:spcPct val="100000"/>
               </a:lnSpc>
               <a:buNone/>
-              <a:defRPr b="0" lang="en-US" sz="900" spc="-1" strike="noStrike">
-                <a:solidFill>
-                  <a:srgbClr val="8b8b8b"/>
-                </a:solidFill>
-                <a:latin typeface="Calibri"/>
+              <a:defRPr b="0" lang="en-US" sz="1400" spc="-1" strike="noStrike">
+                <a:latin typeface="Times New Roman"/>
               </a:defRPr>
             </a:lvl1pPr>
           </a:lstStyle>
           <a:p>
-            <a:pPr>
+            <a:pPr algn="ctr">
               <a:lnSpc>
                 <a:spcPct val="100000"/>
               </a:lnSpc>
               <a:buNone/>
             </a:pPr>
             <a:r>
-              <a:rPr b="0" lang="en-US" sz="900" spc="-1" strike="noStrike">
-                <a:solidFill>
-                  <a:srgbClr val="8b8b8b"/>
-                </a:solidFill>
-                <a:latin typeface="Calibri"/>
-              </a:rPr>
-              <a:t>&lt;date/time&gt;</a:t>
-            </a:r>
-            <a:endParaRPr b="0" lang="en-US" sz="900" spc="-1" strike="noStrike">
+              <a:rPr b="0" lang="en-US" sz="1400" spc="-1" strike="noStrike">
+                <a:latin typeface="Times New Roman"/>
+              </a:rPr>
+              <a:t> </a:t>
+            </a:r>
+            <a:endParaRPr b="0" lang="en-US" sz="1400" spc="-1" strike="noStrike">
               <a:latin typeface="Times New Roman"/>
             </a:endParaRPr>
           </a:p>
@@ -3694,108 +3385,104 @@
             <a:spLocks noGrp="1"/>
           </p:cNvSpPr>
           <p:nvPr>
-            <p:ph type="ftr" idx="2"/>
+            <p:ph type="sldNum" idx="2"/>
           </p:nvPr>
         </p:nvSpPr>
         <p:spPr>
           <a:xfrm>
-            <a:off x="3029040" y="4767120"/>
-            <a:ext cx="3085920" cy="273600"/>
-          </a:xfrm>
-          <a:prstGeom prst="rect">
-            <a:avLst/>
-          </a:prstGeom>
-          <a:noFill/>
-          <a:ln w="0">
-            <a:noFill/>
-          </a:ln>
-        </p:spPr>
-        <p:txBody>
-          <a:bodyPr anchor="ctr">
+            <a:off x="6458040" y="4767120"/>
+            <a:ext cx="2056680" cy="273240"/>
+          </a:xfrm>
+          <a:prstGeom prst="rect">
+            <a:avLst/>
+          </a:prstGeom>
+          <a:noFill/>
+          <a:ln w="0">
+            <a:noFill/>
+          </a:ln>
+        </p:spPr>
+        <p:txBody>
+          <a:bodyPr lIns="90000" rIns="90000" tIns="45000" bIns="45000" anchor="ctr">
             <a:noAutofit/>
           </a:bodyPr>
           <a:lstStyle>
-            <a:lvl1pPr algn="ctr">
-              <a:buNone/>
+            <a:lvl1pPr algn="r">
+              <a:lnSpc>
+                <a:spcPct val="100000"/>
+              </a:lnSpc>
+              <a:buNone/>
+              <a:defRPr b="0" lang="en-US" sz="900" spc="-1" strike="noStrike">
+                <a:solidFill>
+                  <a:srgbClr val="8b8b8b"/>
+                </a:solidFill>
+                <a:latin typeface="Calibri"/>
+              </a:defRPr>
+            </a:lvl1pPr>
+          </a:lstStyle>
+          <a:p>
+            <a:pPr algn="r">
+              <a:lnSpc>
+                <a:spcPct val="100000"/>
+              </a:lnSpc>
+              <a:buNone/>
+            </a:pPr>
+            <a:fld id="{D5116B3C-0AB4-4A06-AE1F-F4AC2FB82244}" type="slidenum">
+              <a:rPr b="0" lang="en-US" sz="900" spc="-1" strike="noStrike">
+                <a:solidFill>
+                  <a:srgbClr val="8b8b8b"/>
+                </a:solidFill>
+                <a:latin typeface="Calibri"/>
+              </a:rPr>
+              <a:t>1</a:t>
+            </a:fld>
+            <a:endParaRPr b="0" lang="en-US" sz="900" spc="-1" strike="noStrike">
+              <a:latin typeface="Times New Roman"/>
+            </a:endParaRPr>
+          </a:p>
+        </p:txBody>
+      </p:sp>
+      <p:sp>
+        <p:nvSpPr>
+          <p:cNvPr id="3" name="PlaceHolder 4"/>
+          <p:cNvSpPr>
+            <a:spLocks noGrp="1"/>
+          </p:cNvSpPr>
+          <p:nvPr>
+            <p:ph type="dt" idx="3"/>
+          </p:nvPr>
+        </p:nvSpPr>
+        <p:spPr>
+          <a:xfrm>
+            <a:off x="628560" y="4767120"/>
+            <a:ext cx="2056680" cy="273240"/>
+          </a:xfrm>
+          <a:prstGeom prst="rect">
+            <a:avLst/>
+          </a:prstGeom>
+          <a:noFill/>
+          <a:ln w="0">
+            <a:noFill/>
+          </a:ln>
+        </p:spPr>
+        <p:txBody>
+          <a:bodyPr lIns="90000" rIns="90000" tIns="45000" bIns="45000" anchor="ctr">
+            <a:noAutofit/>
+          </a:bodyPr>
+          <a:lstStyle>
+            <a:lvl1pPr>
               <a:defRPr b="0" lang="en-US" sz="1400" spc="-1" strike="noStrike">
                 <a:latin typeface="Times New Roman"/>
               </a:defRPr>
             </a:lvl1pPr>
           </a:lstStyle>
           <a:p>
-            <a:pPr algn="ctr">
-              <a:buNone/>
-            </a:pPr>
             <a:r>
               <a:rPr b="0" lang="en-US" sz="1400" spc="-1" strike="noStrike">
                 <a:latin typeface="Times New Roman"/>
               </a:rPr>
-              <a:t>&lt;footer&gt;</a:t>
+              <a:t> </a:t>
             </a:r>
             <a:endParaRPr b="0" lang="en-US" sz="1400" spc="-1" strike="noStrike">
-              <a:latin typeface="Times New Roman"/>
-            </a:endParaRPr>
-          </a:p>
-        </p:txBody>
-      </p:sp>
-      <p:sp>
-        <p:nvSpPr>
-          <p:cNvPr id="3" name="PlaceHolder 4"/>
-          <p:cNvSpPr>
-            <a:spLocks noGrp="1"/>
-          </p:cNvSpPr>
-          <p:nvPr>
-            <p:ph type="sldNum" idx="3"/>
-          </p:nvPr>
-        </p:nvSpPr>
-        <p:spPr>
-          <a:xfrm>
-            <a:off x="6458040" y="4767120"/>
-            <a:ext cx="2057040" cy="273600"/>
-          </a:xfrm>
-          <a:prstGeom prst="rect">
-            <a:avLst/>
-          </a:prstGeom>
-          <a:noFill/>
-          <a:ln w="0">
-            <a:noFill/>
-          </a:ln>
-        </p:spPr>
-        <p:txBody>
-          <a:bodyPr anchor="ctr">
-            <a:noAutofit/>
-          </a:bodyPr>
-          <a:lstStyle>
-            <a:lvl1pPr algn="r">
-              <a:lnSpc>
-                <a:spcPct val="100000"/>
-              </a:lnSpc>
-              <a:buNone/>
-              <a:defRPr b="0" lang="en-US" sz="900" spc="-1" strike="noStrike">
-                <a:solidFill>
-                  <a:srgbClr val="8b8b8b"/>
-                </a:solidFill>
-                <a:latin typeface="Calibri"/>
-              </a:defRPr>
-            </a:lvl1pPr>
-          </a:lstStyle>
-          <a:p>
-            <a:pPr algn="r">
-              <a:lnSpc>
-                <a:spcPct val="100000"/>
-              </a:lnSpc>
-              <a:buNone/>
-            </a:pPr>
-            <a:fld id="{2BF25A02-E64C-4131-846A-FFBB7EF868D1}" type="slidenum">
-              <a:rPr b="0" lang="en-US" sz="900" spc="-1" strike="noStrike">
-                <a:solidFill>
-                  <a:srgbClr val="8b8b8b"/>
-                </a:solidFill>
-                <a:latin typeface="Calibri"/>
-              </a:rPr>
-              <a:t>&lt;number&gt;</a:t>
-            </a:fld>
-            <a:endParaRPr b="0" lang="en-US" sz="900" spc="-1" strike="noStrike">
               <a:latin typeface="Times New Roman"/>
             </a:endParaRPr>
           </a:p>
@@ -3830,9 +3517,6 @@
           </a:bodyPr>
           <a:p>
             <a:pPr marL="432000" indent="-324000">
-              <a:lnSpc>
-                <a:spcPct val="90000"/>
-              </a:lnSpc>
               <a:spcBef>
                 <a:spcPts val="1417"/>
               </a:spcBef>
@@ -3844,26 +3528,17 @@
               <a:buChar char=""/>
             </a:pPr>
             <a:r>
-              <a:rPr b="0" lang="en-US" sz="2100" spc="-1" strike="noStrike">
-                <a:solidFill>
-                  <a:srgbClr val="000000"/>
-                </a:solidFill>
-                <a:latin typeface="Calibri"/>
+              <a:rPr b="0" lang="en-US" sz="3200" spc="-1" strike="noStrike">
+                <a:latin typeface="Arial"/>
               </a:rPr>
               <a:t>Click to edit the outline text format</a:t>
             </a:r>
-            <a:endParaRPr b="0" lang="en-US" sz="2100" spc="-1" strike="noStrike">
-              <a:solidFill>
-                <a:srgbClr val="000000"/>
-              </a:solidFill>
-              <a:latin typeface="Calibri"/>
+            <a:endParaRPr b="0" lang="en-US" sz="3200" spc="-1" strike="noStrike">
+              <a:latin typeface="Arial"/>
             </a:endParaRPr>
           </a:p>
           <a:p>
             <a:pPr lvl="1" marL="864000" indent="-324000">
-              <a:lnSpc>
-                <a:spcPct val="90000"/>
-              </a:lnSpc>
               <a:spcBef>
                 <a:spcPts val="1134"/>
               </a:spcBef>
@@ -3875,26 +3550,17 @@
               <a:buChar char=""/>
             </a:pPr>
             <a:r>
-              <a:rPr b="0" lang="en-US" sz="1500" spc="-1" strike="noStrike">
-                <a:solidFill>
-                  <a:srgbClr val="000000"/>
-                </a:solidFill>
-                <a:latin typeface="Calibri"/>
+              <a:rPr b="0" lang="en-US" sz="2800" spc="-1" strike="noStrike">
+                <a:latin typeface="Arial"/>
               </a:rPr>
               <a:t>Second Outline Level</a:t>
             </a:r>
-            <a:endParaRPr b="0" lang="en-US" sz="1500" spc="-1" strike="noStrike">
-              <a:solidFill>
-                <a:srgbClr val="000000"/>
-              </a:solidFill>
-              <a:latin typeface="Calibri"/>
+            <a:endParaRPr b="0" lang="en-US" sz="2800" spc="-1" strike="noStrike">
+              <a:latin typeface="Arial"/>
             </a:endParaRPr>
           </a:p>
           <a:p>
             <a:pPr lvl="2" marL="1296000" indent="-288000">
-              <a:lnSpc>
-                <a:spcPct val="90000"/>
-              </a:lnSpc>
               <a:spcBef>
                 <a:spcPts val="850"/>
               </a:spcBef>
@@ -3906,26 +3572,17 @@
               <a:buChar char=""/>
             </a:pPr>
             <a:r>
-              <a:rPr b="0" lang="en-US" sz="1350" spc="-1" strike="noStrike">
-                <a:solidFill>
-                  <a:srgbClr val="000000"/>
-                </a:solidFill>
-                <a:latin typeface="Calibri"/>
+              <a:rPr b="0" lang="en-US" sz="2400" spc="-1" strike="noStrike">
+                <a:latin typeface="Arial"/>
               </a:rPr>
               <a:t>Third Outline Level</a:t>
             </a:r>
-            <a:endParaRPr b="0" lang="en-US" sz="1350" spc="-1" strike="noStrike">
-              <a:solidFill>
-                <a:srgbClr val="000000"/>
-              </a:solidFill>
-              <a:latin typeface="Calibri"/>
+            <a:endParaRPr b="0" lang="en-US" sz="2400" spc="-1" strike="noStrike">
+              <a:latin typeface="Arial"/>
             </a:endParaRPr>
           </a:p>
           <a:p>
             <a:pPr lvl="3" marL="1728000" indent="-216000">
-              <a:lnSpc>
-                <a:spcPct val="90000"/>
-              </a:lnSpc>
               <a:spcBef>
                 <a:spcPts val="567"/>
               </a:spcBef>
@@ -3937,26 +3594,17 @@
               <a:buChar char=""/>
             </a:pPr>
             <a:r>
-              <a:rPr b="0" lang="en-US" sz="1350" spc="-1" strike="noStrike">
-                <a:solidFill>
-                  <a:srgbClr val="000000"/>
-                </a:solidFill>
-                <a:latin typeface="Calibri"/>
+              <a:rPr b="0" lang="en-US" sz="2000" spc="-1" strike="noStrike">
+                <a:latin typeface="Arial"/>
               </a:rPr>
               <a:t>Fourth Outline Level</a:t>
             </a:r>
-            <a:endParaRPr b="0" lang="en-US" sz="1350" spc="-1" strike="noStrike">
-              <a:solidFill>
-                <a:srgbClr val="000000"/>
-              </a:solidFill>
-              <a:latin typeface="Calibri"/>
+            <a:endParaRPr b="0" lang="en-US" sz="2000" spc="-1" strike="noStrike">
+              <a:latin typeface="Arial"/>
             </a:endParaRPr>
           </a:p>
           <a:p>
             <a:pPr lvl="4" marL="2160000" indent="-216000">
-              <a:lnSpc>
-                <a:spcPct val="90000"/>
-              </a:lnSpc>
               <a:spcBef>
                 <a:spcPts val="283"/>
               </a:spcBef>
@@ -3969,25 +3617,16 @@
             </a:pPr>
             <a:r>
               <a:rPr b="0" lang="en-US" sz="2000" spc="-1" strike="noStrike">
-                <a:solidFill>
-                  <a:srgbClr val="000000"/>
-                </a:solidFill>
-                <a:latin typeface="Calibri"/>
+                <a:latin typeface="Arial"/>
               </a:rPr>
               <a:t>Fifth Outline Level</a:t>
             </a:r>
             <a:endParaRPr b="0" lang="en-US" sz="2000" spc="-1" strike="noStrike">
-              <a:solidFill>
-                <a:srgbClr val="000000"/>
-              </a:solidFill>
-              <a:latin typeface="Calibri"/>
+              <a:latin typeface="Arial"/>
             </a:endParaRPr>
           </a:p>
           <a:p>
             <a:pPr lvl="5" marL="2592000" indent="-216000">
-              <a:lnSpc>
-                <a:spcPct val="90000"/>
-              </a:lnSpc>
               <a:spcBef>
                 <a:spcPts val="283"/>
               </a:spcBef>
@@ -4000,25 +3639,16 @@
             </a:pPr>
             <a:r>
               <a:rPr b="0" lang="en-US" sz="2000" spc="-1" strike="noStrike">
-                <a:solidFill>
-                  <a:srgbClr val="000000"/>
-                </a:solidFill>
-                <a:latin typeface="Calibri"/>
+                <a:latin typeface="Arial"/>
               </a:rPr>
               <a:t>Sixth Outline Level</a:t>
             </a:r>
             <a:endParaRPr b="0" lang="en-US" sz="2000" spc="-1" strike="noStrike">
-              <a:solidFill>
-                <a:srgbClr val="000000"/>
-              </a:solidFill>
-              <a:latin typeface="Calibri"/>
+              <a:latin typeface="Arial"/>
             </a:endParaRPr>
           </a:p>
           <a:p>
             <a:pPr lvl="6" marL="3024000" indent="-216000">
-              <a:lnSpc>
-                <a:spcPct val="90000"/>
-              </a:lnSpc>
               <a:spcBef>
                 <a:spcPts val="283"/>
               </a:spcBef>
@@ -4031,18 +3661,12 @@
             </a:pPr>
             <a:r>
               <a:rPr b="0" lang="en-US" sz="2000" spc="-1" strike="noStrike">
-                <a:solidFill>
-                  <a:srgbClr val="000000"/>
-                </a:solidFill>
-                <a:latin typeface="Calibri"/>
+                <a:latin typeface="Arial"/>
               </a:rPr>
               <a:t>Seventh Outline Level</a:t>
             </a:r>
             <a:endParaRPr b="0" lang="en-US" sz="2000" spc="-1" strike="noStrike">
-              <a:solidFill>
-                <a:srgbClr val="000000"/>
-              </a:solidFill>
-              <a:latin typeface="Calibri"/>
+              <a:latin typeface="Arial"/>
             </a:endParaRPr>
           </a:p>
         </p:txBody>
@@ -4100,7 +3724,7 @@
         <p:spPr>
           <a:xfrm>
             <a:off x="186840" y="185400"/>
-            <a:ext cx="8770320" cy="4758120"/>
+            <a:ext cx="8769960" cy="4757760"/>
           </a:xfrm>
           <a:prstGeom prst="roundRect">
             <a:avLst>
@@ -4138,7 +3762,7 @@
         <p:spPr>
           <a:xfrm>
             <a:off x="460080" y="658080"/>
-            <a:ext cx="8469000" cy="3306960"/>
+            <a:ext cx="8468640" cy="3306600"/>
           </a:xfrm>
           <a:prstGeom prst="rect">
             <a:avLst/>
@@ -4190,7 +3814,7 @@
         <p:spPr>
           <a:xfrm>
             <a:off x="460080" y="4595760"/>
-            <a:ext cx="2999160" cy="269640"/>
+            <a:ext cx="2998800" cy="269280"/>
           </a:xfrm>
           <a:prstGeom prst="rect">
             <a:avLst/>
@@ -4223,6 +3847,7 @@
                   <a:srgbClr val="f2f2f2"/>
                 </a:solidFill>
                 <a:latin typeface="Arial"/>
+                <a:ea typeface="DejaVu Sans"/>
               </a:rPr>
               <a:t>Презентация создана в </a:t>
             </a:r>
@@ -4232,6 +3857,7 @@
                   <a:srgbClr val="f2f2f2"/>
                 </a:solidFill>
                 <a:latin typeface="Arial"/>
+                <a:ea typeface="DejaVu Sans"/>
               </a:rPr>
               <a:t>Fibonacci</a:t>
             </a:r>
@@ -4254,7 +3880,7 @@
         <p:spPr>
           <a:xfrm>
             <a:off x="2423160" y="4596480"/>
-            <a:ext cx="291240" cy="291240"/>
+            <a:ext cx="290880" cy="290880"/>
           </a:xfrm>
           <a:prstGeom prst="rect">
             <a:avLst/>
@@ -4264,57 +3890,6 @@
           </a:ln>
         </p:spPr>
       </p:pic>
-      <p:sp>
-        <p:nvSpPr>
-          <p:cNvPr id="51" name="Прямоугольник 5"/>
-          <p:cNvSpPr/>
-          <p:nvPr/>
-        </p:nvSpPr>
-        <p:spPr>
-          <a:xfrm>
-            <a:off x="460080" y="358920"/>
-            <a:ext cx="2999160" cy="269640"/>
-          </a:xfrm>
-          <a:prstGeom prst="rect">
-            <a:avLst/>
-          </a:prstGeom>
-          <a:noFill/>
-          <a:ln w="0">
-            <a:noFill/>
-          </a:ln>
-        </p:spPr>
-        <p:style>
-          <a:lnRef idx="0"/>
-          <a:fillRef idx="0"/>
-          <a:effectRef idx="0"/>
-          <a:fontRef idx="minor"/>
-        </p:style>
-        <p:txBody>
-          <a:bodyPr lIns="90000" rIns="90000" tIns="45000" bIns="45000" anchor="t">
-            <a:noAutofit/>
-          </a:bodyPr>
-          <a:p>
-            <a:pPr>
-              <a:lnSpc>
-                <a:spcPts val="1650"/>
-              </a:lnSpc>
-              <a:buNone/>
-            </a:pPr>
-            <a:r>
-              <a:rPr b="0" lang="ru-RU" sz="1400" spc="-1" strike="noStrike">
-                <a:solidFill>
-                  <a:srgbClr val="f2f2f2"/>
-                </a:solidFill>
-                <a:latin typeface="Arial"/>
-              </a:rPr>
-              <a:t>Тема:</a:t>
-            </a:r>
-            <a:endParaRPr b="0" lang="en-US" sz="1400" spc="-1" strike="noStrike">
-              <a:latin typeface="Arial"/>
-            </a:endParaRPr>
-          </a:p>
-        </p:txBody>
-      </p:sp>
     </p:spTree>
   </p:cSld>
   <mc:AlternateContent>
@@ -4354,14 +3929,14 @@
       </p:grpSpPr>
       <p:sp>
         <p:nvSpPr>
-          <p:cNvPr id="149" name="Прямоугольник со скругленными углами 3"/>
+          <p:cNvPr id="148" name="Прямоугольник со скругленными углами 3"/>
           <p:cNvSpPr/>
           <p:nvPr/>
         </p:nvSpPr>
         <p:spPr>
           <a:xfrm>
             <a:off x="0" y="0"/>
-            <a:ext cx="9143640" cy="1961640"/>
+            <a:ext cx="9143280" cy="1961280"/>
           </a:xfrm>
           <a:prstGeom prst="roundRect">
             <a:avLst>
@@ -4420,14 +3995,14 @@
       </p:sp>
       <p:sp>
         <p:nvSpPr>
-          <p:cNvPr id="150" name="TextBox 10"/>
+          <p:cNvPr id="149" name="TextBox 10"/>
           <p:cNvSpPr/>
           <p:nvPr/>
         </p:nvSpPr>
         <p:spPr>
           <a:xfrm>
             <a:off x="384840" y="2571840"/>
-            <a:ext cx="2665080" cy="713880"/>
+            <a:ext cx="2664720" cy="713520"/>
           </a:xfrm>
           <a:prstGeom prst="rect">
             <a:avLst/>
@@ -4472,14 +4047,14 @@
       </p:sp>
       <p:sp>
         <p:nvSpPr>
-          <p:cNvPr id="151" name="TextBox 10"/>
+          <p:cNvPr id="150" name="TextBox 10"/>
           <p:cNvSpPr/>
           <p:nvPr/>
         </p:nvSpPr>
         <p:spPr>
           <a:xfrm>
             <a:off x="384840" y="3456360"/>
-            <a:ext cx="2665080" cy="1565280"/>
+            <a:ext cx="2664720" cy="1564920"/>
           </a:xfrm>
           <a:prstGeom prst="rect">
             <a:avLst/>
@@ -4534,14 +4109,14 @@
       </p:sp>
       <p:sp>
         <p:nvSpPr>
-          <p:cNvPr id="152" name="TextBox 10"/>
+          <p:cNvPr id="151" name="TextBox 10"/>
           <p:cNvSpPr/>
           <p:nvPr/>
         </p:nvSpPr>
         <p:spPr>
           <a:xfrm>
             <a:off x="3239280" y="2571840"/>
-            <a:ext cx="2665080" cy="713880"/>
+            <a:ext cx="2664720" cy="713520"/>
           </a:xfrm>
           <a:prstGeom prst="rect">
             <a:avLst/>
@@ -4586,14 +4161,14 @@
       </p:sp>
       <p:sp>
         <p:nvSpPr>
-          <p:cNvPr id="153" name="TextBox 10"/>
+          <p:cNvPr id="152" name="TextBox 10"/>
           <p:cNvSpPr/>
           <p:nvPr/>
         </p:nvSpPr>
         <p:spPr>
           <a:xfrm>
             <a:off x="3239280" y="3456360"/>
-            <a:ext cx="2665080" cy="1565280"/>
+            <a:ext cx="2664720" cy="1564920"/>
           </a:xfrm>
           <a:prstGeom prst="rect">
             <a:avLst/>
@@ -4648,14 +4223,14 @@
       </p:sp>
       <p:sp>
         <p:nvSpPr>
-          <p:cNvPr id="154" name="TextBox 10"/>
+          <p:cNvPr id="153" name="TextBox 10"/>
           <p:cNvSpPr/>
           <p:nvPr/>
         </p:nvSpPr>
         <p:spPr>
           <a:xfrm>
             <a:off x="6093720" y="2571840"/>
-            <a:ext cx="2665080" cy="713880"/>
+            <a:ext cx="2664720" cy="713520"/>
           </a:xfrm>
           <a:prstGeom prst="rect">
             <a:avLst/>
@@ -4700,14 +4275,14 @@
       </p:sp>
       <p:sp>
         <p:nvSpPr>
-          <p:cNvPr id="155" name="TextBox 10"/>
+          <p:cNvPr id="154" name="TextBox 10"/>
           <p:cNvSpPr/>
           <p:nvPr/>
         </p:nvSpPr>
         <p:spPr>
           <a:xfrm>
             <a:off x="6093720" y="3456360"/>
-            <a:ext cx="2665080" cy="1565280"/>
+            <a:ext cx="2664720" cy="1564920"/>
           </a:xfrm>
           <a:prstGeom prst="rect">
             <a:avLst/>
@@ -4762,7 +4337,7 @@
       </p:sp>
       <p:sp>
         <p:nvSpPr>
-          <p:cNvPr id="156" name="Прямая соединительная линия 2"/>
+          <p:cNvPr id="155" name="Прямая соединительная линия 2"/>
           <p:cNvSpPr/>
           <p:nvPr/>
         </p:nvSpPr>
@@ -4795,7 +4370,7 @@
       </p:sp>
       <p:sp>
         <p:nvSpPr>
-          <p:cNvPr id="157" name="Прямая соединительная линия 11"/>
+          <p:cNvPr id="156" name="Прямая соединительная линия 11"/>
           <p:cNvSpPr/>
           <p:nvPr/>
         </p:nvSpPr>
@@ -4828,7 +4403,7 @@
       </p:sp>
       <p:sp>
         <p:nvSpPr>
-          <p:cNvPr id="158" name="Прямая соединительная линия 30"/>
+          <p:cNvPr id="157" name="Прямая соединительная линия 30"/>
           <p:cNvSpPr/>
           <p:nvPr/>
         </p:nvSpPr>
@@ -4861,14 +4436,14 @@
       </p:sp>
       <p:sp>
         <p:nvSpPr>
-          <p:cNvPr id="159" name="TextBox 12"/>
+          <p:cNvPr id="158" name="TextBox 12"/>
           <p:cNvSpPr/>
           <p:nvPr/>
         </p:nvSpPr>
         <p:spPr>
           <a:xfrm>
             <a:off x="384840" y="2178000"/>
-            <a:ext cx="8465760" cy="480960"/>
+            <a:ext cx="8465400" cy="480600"/>
           </a:xfrm>
           <a:prstGeom prst="rect">
             <a:avLst/>
@@ -4901,6 +4476,7 @@
                   <a:srgbClr val="ffffff"/>
                 </a:solidFill>
                 <a:latin typeface="Arial"/>
+                <a:ea typeface="DejaVu Sans"/>
               </a:rPr>
               <a:t>TITLE</a:t>
             </a:r>
@@ -4949,14 +4525,14 @@
       </p:grpSpPr>
       <p:sp>
         <p:nvSpPr>
-          <p:cNvPr id="160" name="TextBox 20"/>
+          <p:cNvPr id="159" name="TextBox 20"/>
           <p:cNvSpPr/>
           <p:nvPr/>
         </p:nvSpPr>
         <p:spPr>
           <a:xfrm>
             <a:off x="516960" y="411840"/>
-            <a:ext cx="8398080" cy="576000"/>
+            <a:ext cx="8397720" cy="575640"/>
           </a:xfrm>
           <a:prstGeom prst="rect">
             <a:avLst/>
@@ -4989,6 +4565,7 @@
                   <a:srgbClr val="ffffff"/>
                 </a:solidFill>
                 <a:latin typeface="Arial"/>
+                <a:ea typeface="DejaVu Sans"/>
               </a:rPr>
               <a:t>TITLE</a:t>
             </a:r>
@@ -5000,14 +4577,14 @@
       </p:sp>
       <p:sp>
         <p:nvSpPr>
-          <p:cNvPr id="161" name="TextBox 10"/>
+          <p:cNvPr id="160" name="TextBox 10"/>
           <p:cNvSpPr/>
           <p:nvPr/>
         </p:nvSpPr>
         <p:spPr>
           <a:xfrm>
             <a:off x="516960" y="1058040"/>
-            <a:ext cx="5304240" cy="576000"/>
+            <a:ext cx="5303880" cy="575640"/>
           </a:xfrm>
           <a:prstGeom prst="rect">
             <a:avLst/>
@@ -5052,14 +4629,14 @@
       </p:sp>
       <p:sp>
         <p:nvSpPr>
-          <p:cNvPr id="162" name="TextBox 10"/>
+          <p:cNvPr id="161" name="TextBox 10"/>
           <p:cNvSpPr/>
           <p:nvPr/>
         </p:nvSpPr>
         <p:spPr>
           <a:xfrm>
             <a:off x="516960" y="1704600"/>
-            <a:ext cx="5304240" cy="713880"/>
+            <a:ext cx="5303880" cy="713520"/>
           </a:xfrm>
           <a:prstGeom prst="rect">
             <a:avLst/>
@@ -5114,14 +4691,14 @@
       </p:sp>
       <p:sp>
         <p:nvSpPr>
-          <p:cNvPr id="163" name="Прямоугольник со скругленными углами 3"/>
+          <p:cNvPr id="162" name="Прямоугольник со скругленными углами 3"/>
           <p:cNvSpPr/>
           <p:nvPr/>
         </p:nvSpPr>
         <p:spPr>
           <a:xfrm>
             <a:off x="6000480" y="1058400"/>
-            <a:ext cx="2914560" cy="1824480"/>
+            <a:ext cx="2914200" cy="1824120"/>
           </a:xfrm>
           <a:prstGeom prst="roundRect">
             <a:avLst>
@@ -5180,14 +4757,14 @@
       </p:sp>
       <p:sp>
         <p:nvSpPr>
-          <p:cNvPr id="164" name="Прямоугольник со скругленными углами 3"/>
+          <p:cNvPr id="163" name="Прямоугольник со скругленными углами 3"/>
           <p:cNvSpPr/>
           <p:nvPr/>
         </p:nvSpPr>
         <p:spPr>
           <a:xfrm>
             <a:off x="6000480" y="3082320"/>
-            <a:ext cx="2914560" cy="1824480"/>
+            <a:ext cx="2914200" cy="1824120"/>
           </a:xfrm>
           <a:prstGeom prst="roundRect">
             <a:avLst>
@@ -5246,14 +4823,14 @@
       </p:sp>
       <p:sp>
         <p:nvSpPr>
-          <p:cNvPr id="165" name="TextBox 10"/>
+          <p:cNvPr id="164" name="TextBox 10"/>
           <p:cNvSpPr/>
           <p:nvPr/>
         </p:nvSpPr>
         <p:spPr>
           <a:xfrm>
             <a:off x="516960" y="2371320"/>
-            <a:ext cx="5304240" cy="574200"/>
+            <a:ext cx="5303880" cy="573840"/>
           </a:xfrm>
           <a:prstGeom prst="rect">
             <a:avLst/>
@@ -5308,14 +4885,14 @@
       </p:sp>
       <p:sp>
         <p:nvSpPr>
-          <p:cNvPr id="166" name="TextBox 10"/>
+          <p:cNvPr id="165" name="TextBox 10"/>
           <p:cNvSpPr/>
           <p:nvPr/>
         </p:nvSpPr>
         <p:spPr>
           <a:xfrm>
             <a:off x="516960" y="3016440"/>
-            <a:ext cx="5304240" cy="713880"/>
+            <a:ext cx="5303880" cy="713520"/>
           </a:xfrm>
           <a:prstGeom prst="rect">
             <a:avLst/>
@@ -5370,14 +4947,14 @@
       </p:sp>
       <p:sp>
         <p:nvSpPr>
-          <p:cNvPr id="167" name="TextBox 10"/>
+          <p:cNvPr id="166" name="TextBox 10"/>
           <p:cNvSpPr/>
           <p:nvPr/>
         </p:nvSpPr>
         <p:spPr>
           <a:xfrm>
             <a:off x="516960" y="3612960"/>
-            <a:ext cx="5304240" cy="692640"/>
+            <a:ext cx="5303880" cy="692280"/>
           </a:xfrm>
           <a:prstGeom prst="rect">
             <a:avLst/>
@@ -5432,14 +5009,14 @@
       </p:sp>
       <p:sp>
         <p:nvSpPr>
-          <p:cNvPr id="168" name="TextBox 10"/>
+          <p:cNvPr id="167" name="TextBox 10"/>
           <p:cNvSpPr/>
           <p:nvPr/>
         </p:nvSpPr>
         <p:spPr>
           <a:xfrm>
             <a:off x="516960" y="4376160"/>
-            <a:ext cx="5304240" cy="713880"/>
+            <a:ext cx="5303880" cy="713520"/>
           </a:xfrm>
           <a:prstGeom prst="rect">
             <a:avLst/>
@@ -5531,14 +5108,14 @@
       </p:grpSpPr>
       <p:sp>
         <p:nvSpPr>
-          <p:cNvPr id="169" name="Прямоугольник со скругленными углами 3"/>
+          <p:cNvPr id="168" name="Прямоугольник со скругленными углами 3"/>
           <p:cNvSpPr/>
           <p:nvPr/>
         </p:nvSpPr>
         <p:spPr>
           <a:xfrm>
             <a:off x="186840" y="185400"/>
-            <a:ext cx="8770320" cy="4758120"/>
+            <a:ext cx="8769960" cy="4757760"/>
           </a:xfrm>
           <a:prstGeom prst="roundRect">
             <a:avLst>
@@ -5569,14 +5146,14 @@
       </p:sp>
       <p:sp>
         <p:nvSpPr>
-          <p:cNvPr id="170" name="Прямоугольник 10"/>
+          <p:cNvPr id="169" name="Прямоугольник 10"/>
           <p:cNvSpPr/>
           <p:nvPr/>
         </p:nvSpPr>
         <p:spPr>
           <a:xfrm>
             <a:off x="460080" y="658080"/>
-            <a:ext cx="8469000" cy="3306960"/>
+            <a:ext cx="8468640" cy="3306600"/>
           </a:xfrm>
           <a:prstGeom prst="rect">
             <a:avLst/>
@@ -5621,14 +5198,14 @@
       </p:sp>
       <p:sp>
         <p:nvSpPr>
-          <p:cNvPr id="171" name="Прямоугольник 5"/>
+          <p:cNvPr id="170" name="Прямоугольник 5"/>
           <p:cNvSpPr/>
           <p:nvPr/>
         </p:nvSpPr>
         <p:spPr>
           <a:xfrm>
             <a:off x="1640880" y="4497480"/>
-            <a:ext cx="2999160" cy="269640"/>
+            <a:ext cx="2998800" cy="269280"/>
           </a:xfrm>
           <a:prstGeom prst="rect">
             <a:avLst/>
@@ -5661,6 +5238,7 @@
                   <a:srgbClr val="f2f2f2"/>
                 </a:solidFill>
                 <a:latin typeface="Arial"/>
+                <a:ea typeface="DejaVu Sans"/>
               </a:rPr>
               <a:t>Презентация создана в </a:t>
             </a:r>
@@ -5670,6 +5248,7 @@
                   <a:srgbClr val="f2f2f2"/>
                 </a:solidFill>
                 <a:latin typeface="Arial"/>
+                <a:ea typeface="DejaVu Sans"/>
               </a:rPr>
               <a:t>Fibonacci</a:t>
             </a:r>
@@ -5681,14 +5260,14 @@
       </p:sp>
       <p:sp>
         <p:nvSpPr>
-          <p:cNvPr id="172" name="Изображение 40"/>
+          <p:cNvPr id="171" name="Изображение 40"/>
           <p:cNvSpPr/>
           <p:nvPr/>
         </p:nvSpPr>
         <p:spPr>
           <a:xfrm>
             <a:off x="867240" y="3495600"/>
-            <a:ext cx="257040" cy="257040"/>
+            <a:ext cx="256680" cy="256680"/>
           </a:xfrm>
           <a:prstGeom prst="ellipse">
             <a:avLst/>
@@ -5711,7 +5290,7 @@
       </p:sp>
       <p:pic>
         <p:nvPicPr>
-          <p:cNvPr id="173" name="Рисунок 12" descr=""/>
+          <p:cNvPr id="172" name="Рисунок 12" descr=""/>
           <p:cNvPicPr/>
           <p:nvPr/>
         </p:nvPicPr>
@@ -5723,7 +5302,7 @@
         <p:spPr>
           <a:xfrm>
             <a:off x="351000" y="3699000"/>
-            <a:ext cx="1289520" cy="1133640"/>
+            <a:ext cx="1289160" cy="1133280"/>
           </a:xfrm>
           <a:prstGeom prst="rect">
             <a:avLst/>
@@ -5772,14 +5351,14 @@
       </p:grpSpPr>
       <p:sp>
         <p:nvSpPr>
-          <p:cNvPr id="52" name="Прямоугольник со скругленными углами 3"/>
+          <p:cNvPr id="51" name="Прямоугольник со скругленными углами 3"/>
           <p:cNvSpPr/>
           <p:nvPr/>
         </p:nvSpPr>
         <p:spPr>
           <a:xfrm>
             <a:off x="3507480" y="0"/>
-            <a:ext cx="5636160" cy="5143320"/>
+            <a:ext cx="5635800" cy="5142960"/>
           </a:xfrm>
           <a:prstGeom prst="roundRect">
             <a:avLst>
@@ -5836,14 +5415,14 @@
       </p:sp>
       <p:sp>
         <p:nvSpPr>
-          <p:cNvPr id="53" name="Прямоугольник: скругленные углы 2"/>
+          <p:cNvPr id="52" name="Прямоугольник: скругленные углы 2"/>
           <p:cNvSpPr/>
           <p:nvPr/>
         </p:nvSpPr>
         <p:spPr>
           <a:xfrm>
             <a:off x="3722040" y="257040"/>
-            <a:ext cx="5186160" cy="4650120"/>
+            <a:ext cx="5185800" cy="4649760"/>
           </a:xfrm>
           <a:prstGeom prst="roundRect">
             <a:avLst>
@@ -5877,14 +5456,14 @@
       </p:sp>
       <p:sp>
         <p:nvSpPr>
-          <p:cNvPr id="54" name="Овал 1"/>
+          <p:cNvPr id="53" name="Овал 1"/>
           <p:cNvSpPr/>
           <p:nvPr/>
         </p:nvSpPr>
         <p:spPr>
           <a:xfrm>
             <a:off x="4122000" y="631080"/>
-            <a:ext cx="899640" cy="899640"/>
+            <a:ext cx="899280" cy="899280"/>
           </a:xfrm>
           <a:prstGeom prst="ellipse">
             <a:avLst/>
@@ -5927,6 +5506,7 @@
                   <a:srgbClr val="ffffff"/>
                 </a:solidFill>
                 <a:latin typeface="Calibri"/>
+                <a:ea typeface="DejaVu Sans"/>
               </a:rPr>
               <a:t>01</a:t>
             </a:r>
@@ -5938,14 +5518,14 @@
       </p:sp>
       <p:sp>
         <p:nvSpPr>
-          <p:cNvPr id="55" name="Овал 23"/>
+          <p:cNvPr id="54" name="Овал 23"/>
           <p:cNvSpPr/>
           <p:nvPr/>
         </p:nvSpPr>
         <p:spPr>
           <a:xfrm>
             <a:off x="4122000" y="2127600"/>
-            <a:ext cx="899640" cy="887760"/>
+            <a:ext cx="899280" cy="887400"/>
           </a:xfrm>
           <a:prstGeom prst="ellipse">
             <a:avLst/>
@@ -5988,6 +5568,7 @@
                   <a:srgbClr val="ffffff"/>
                 </a:solidFill>
                 <a:latin typeface="Calibri"/>
+                <a:ea typeface="DejaVu Sans"/>
               </a:rPr>
               <a:t>02</a:t>
             </a:r>
@@ -5999,14 +5580,14 @@
       </p:sp>
       <p:sp>
         <p:nvSpPr>
-          <p:cNvPr id="56" name="Овал 29"/>
+          <p:cNvPr id="55" name="Овал 29"/>
           <p:cNvSpPr/>
           <p:nvPr/>
         </p:nvSpPr>
         <p:spPr>
           <a:xfrm>
             <a:off x="4122000" y="3612240"/>
-            <a:ext cx="899640" cy="899640"/>
+            <a:ext cx="899280" cy="899280"/>
           </a:xfrm>
           <a:prstGeom prst="ellipse">
             <a:avLst/>
@@ -6049,6 +5630,7 @@
                   <a:srgbClr val="ffffff"/>
                 </a:solidFill>
                 <a:latin typeface="Calibri"/>
+                <a:ea typeface="DejaVu Sans"/>
               </a:rPr>
               <a:t>03</a:t>
             </a:r>
@@ -6060,14 +5642,14 @@
       </p:sp>
       <p:sp>
         <p:nvSpPr>
-          <p:cNvPr id="57" name="TextBox 10"/>
+          <p:cNvPr id="56" name="TextBox 10"/>
           <p:cNvSpPr/>
           <p:nvPr/>
         </p:nvSpPr>
         <p:spPr>
           <a:xfrm>
             <a:off x="5110920" y="489600"/>
-            <a:ext cx="3579120" cy="550800"/>
+            <a:ext cx="3578760" cy="550440"/>
           </a:xfrm>
           <a:prstGeom prst="rect">
             <a:avLst/>
@@ -6122,14 +5704,14 @@
       </p:sp>
       <p:sp>
         <p:nvSpPr>
-          <p:cNvPr id="58" name="TextBox 10"/>
+          <p:cNvPr id="57" name="TextBox 10"/>
           <p:cNvSpPr/>
           <p:nvPr/>
         </p:nvSpPr>
         <p:spPr>
           <a:xfrm>
             <a:off x="5110920" y="1025280"/>
-            <a:ext cx="3579120" cy="789840"/>
+            <a:ext cx="3578760" cy="789480"/>
           </a:xfrm>
           <a:prstGeom prst="rect">
             <a:avLst/>
@@ -6184,14 +5766,14 @@
       </p:sp>
       <p:sp>
         <p:nvSpPr>
-          <p:cNvPr id="59" name="TextBox 10"/>
+          <p:cNvPr id="58" name="TextBox 10"/>
           <p:cNvSpPr/>
           <p:nvPr/>
         </p:nvSpPr>
         <p:spPr>
           <a:xfrm>
             <a:off x="5107320" y="1985400"/>
-            <a:ext cx="3579120" cy="550800"/>
+            <a:ext cx="3578760" cy="550440"/>
           </a:xfrm>
           <a:prstGeom prst="rect">
             <a:avLst/>
@@ -6236,14 +5818,14 @@
       </p:sp>
       <p:sp>
         <p:nvSpPr>
-          <p:cNvPr id="60" name="TextBox 10"/>
+          <p:cNvPr id="59" name="TextBox 10"/>
           <p:cNvSpPr/>
           <p:nvPr/>
         </p:nvSpPr>
         <p:spPr>
           <a:xfrm>
             <a:off x="5107320" y="2517840"/>
-            <a:ext cx="3579120" cy="843480"/>
+            <a:ext cx="3578760" cy="843120"/>
           </a:xfrm>
           <a:prstGeom prst="rect">
             <a:avLst/>
@@ -6298,14 +5880,14 @@
       </p:sp>
       <p:sp>
         <p:nvSpPr>
-          <p:cNvPr id="61" name="TextBox 10"/>
+          <p:cNvPr id="60" name="TextBox 10"/>
           <p:cNvSpPr/>
           <p:nvPr/>
         </p:nvSpPr>
         <p:spPr>
           <a:xfrm>
             <a:off x="5107320" y="3470760"/>
-            <a:ext cx="3579120" cy="550800"/>
+            <a:ext cx="3578760" cy="550440"/>
           </a:xfrm>
           <a:prstGeom prst="rect">
             <a:avLst/>
@@ -6350,14 +5932,14 @@
       </p:sp>
       <p:sp>
         <p:nvSpPr>
-          <p:cNvPr id="62" name="TextBox 10"/>
+          <p:cNvPr id="61" name="TextBox 10"/>
           <p:cNvSpPr/>
           <p:nvPr/>
         </p:nvSpPr>
         <p:spPr>
           <a:xfrm>
             <a:off x="5107320" y="4003560"/>
-            <a:ext cx="3579120" cy="794880"/>
+            <a:ext cx="3578760" cy="794520"/>
           </a:xfrm>
           <a:prstGeom prst="rect">
             <a:avLst/>
@@ -6412,14 +5994,14 @@
       </p:sp>
       <p:sp>
         <p:nvSpPr>
-          <p:cNvPr id="63" name="TextBox 13"/>
+          <p:cNvPr id="62" name="TextBox 13"/>
           <p:cNvSpPr/>
           <p:nvPr/>
         </p:nvSpPr>
         <p:spPr>
           <a:xfrm>
             <a:off x="165960" y="200880"/>
-            <a:ext cx="3148200" cy="1842120"/>
+            <a:ext cx="3147840" cy="1841760"/>
           </a:xfrm>
           <a:prstGeom prst="rect">
             <a:avLst/>
@@ -6452,6 +6034,7 @@
                   <a:srgbClr val="ffffff"/>
                 </a:solidFill>
                 <a:latin typeface="Arial"/>
+                <a:ea typeface="DejaVu Sans"/>
               </a:rPr>
               <a:t>TITLE</a:t>
             </a:r>
@@ -6500,14 +6083,14 @@
       </p:grpSpPr>
       <p:sp>
         <p:nvSpPr>
-          <p:cNvPr id="64" name="Прямоугольник со скругленными углами 3"/>
+          <p:cNvPr id="63" name="Прямоугольник со скругленными углами 3"/>
           <p:cNvSpPr/>
           <p:nvPr/>
         </p:nvSpPr>
         <p:spPr>
           <a:xfrm>
             <a:off x="0" y="0"/>
-            <a:ext cx="9143640" cy="1961640"/>
+            <a:ext cx="9143280" cy="1961280"/>
           </a:xfrm>
           <a:prstGeom prst="roundRect">
             <a:avLst>
@@ -6566,14 +6149,14 @@
       </p:sp>
       <p:sp>
         <p:nvSpPr>
-          <p:cNvPr id="65" name="TextBox 10"/>
+          <p:cNvPr id="64" name="TextBox 10"/>
           <p:cNvSpPr/>
           <p:nvPr/>
         </p:nvSpPr>
         <p:spPr>
           <a:xfrm>
             <a:off x="384840" y="2571840"/>
-            <a:ext cx="2665080" cy="713880"/>
+            <a:ext cx="2664720" cy="713520"/>
           </a:xfrm>
           <a:prstGeom prst="rect">
             <a:avLst/>
@@ -6618,14 +6201,14 @@
       </p:sp>
       <p:sp>
         <p:nvSpPr>
-          <p:cNvPr id="66" name="TextBox 10"/>
+          <p:cNvPr id="65" name="TextBox 10"/>
           <p:cNvSpPr/>
           <p:nvPr/>
         </p:nvSpPr>
         <p:spPr>
           <a:xfrm>
             <a:off x="384840" y="3356280"/>
-            <a:ext cx="2665080" cy="1565280"/>
+            <a:ext cx="2664720" cy="1564920"/>
           </a:xfrm>
           <a:prstGeom prst="rect">
             <a:avLst/>
@@ -6680,14 +6263,14 @@
       </p:sp>
       <p:sp>
         <p:nvSpPr>
-          <p:cNvPr id="67" name="TextBox 10"/>
+          <p:cNvPr id="66" name="TextBox 10"/>
           <p:cNvSpPr/>
           <p:nvPr/>
         </p:nvSpPr>
         <p:spPr>
           <a:xfrm>
             <a:off x="3239280" y="2571840"/>
-            <a:ext cx="2665080" cy="713880"/>
+            <a:ext cx="2664720" cy="713520"/>
           </a:xfrm>
           <a:prstGeom prst="rect">
             <a:avLst/>
@@ -6732,14 +6315,14 @@
       </p:sp>
       <p:sp>
         <p:nvSpPr>
-          <p:cNvPr id="68" name="TextBox 10"/>
+          <p:cNvPr id="67" name="TextBox 10"/>
           <p:cNvSpPr/>
           <p:nvPr/>
         </p:nvSpPr>
         <p:spPr>
           <a:xfrm>
             <a:off x="3239280" y="3356280"/>
-            <a:ext cx="2665080" cy="1565280"/>
+            <a:ext cx="2664720" cy="1564920"/>
           </a:xfrm>
           <a:prstGeom prst="rect">
             <a:avLst/>
@@ -6794,14 +6377,14 @@
       </p:sp>
       <p:sp>
         <p:nvSpPr>
-          <p:cNvPr id="69" name="TextBox 10"/>
+          <p:cNvPr id="68" name="TextBox 10"/>
           <p:cNvSpPr/>
           <p:nvPr/>
         </p:nvSpPr>
         <p:spPr>
           <a:xfrm>
             <a:off x="6093720" y="2571840"/>
-            <a:ext cx="2665080" cy="713880"/>
+            <a:ext cx="2664720" cy="713520"/>
           </a:xfrm>
           <a:prstGeom prst="rect">
             <a:avLst/>
@@ -6846,14 +6429,14 @@
       </p:sp>
       <p:sp>
         <p:nvSpPr>
-          <p:cNvPr id="70" name="TextBox 10"/>
+          <p:cNvPr id="69" name="TextBox 10"/>
           <p:cNvSpPr/>
           <p:nvPr/>
         </p:nvSpPr>
         <p:spPr>
           <a:xfrm>
             <a:off x="6093720" y="3356280"/>
-            <a:ext cx="2665080" cy="1565280"/>
+            <a:ext cx="2664720" cy="1564920"/>
           </a:xfrm>
           <a:prstGeom prst="rect">
             <a:avLst/>
@@ -6908,14 +6491,14 @@
       </p:sp>
       <p:sp>
         <p:nvSpPr>
-          <p:cNvPr id="71" name="TextBox 9"/>
+          <p:cNvPr id="70" name="TextBox 9"/>
           <p:cNvSpPr/>
           <p:nvPr/>
         </p:nvSpPr>
         <p:spPr>
           <a:xfrm>
             <a:off x="384840" y="2178000"/>
-            <a:ext cx="8465760" cy="480960"/>
+            <a:ext cx="8465400" cy="480600"/>
           </a:xfrm>
           <a:prstGeom prst="rect">
             <a:avLst/>
@@ -6948,6 +6531,7 @@
                   <a:srgbClr val="ffffff"/>
                 </a:solidFill>
                 <a:latin typeface="Arial"/>
+                <a:ea typeface="DejaVu Sans"/>
               </a:rPr>
               <a:t>TITLE</a:t>
             </a:r>
@@ -6996,14 +6580,14 @@
       </p:grpSpPr>
       <p:sp>
         <p:nvSpPr>
-          <p:cNvPr id="72" name="Прямоугольник: скругленные углы 15"/>
+          <p:cNvPr id="71" name="Прямоугольник: скругленные углы 15"/>
           <p:cNvSpPr/>
           <p:nvPr/>
         </p:nvSpPr>
         <p:spPr>
           <a:xfrm>
             <a:off x="4636440" y="250200"/>
-            <a:ext cx="4198320" cy="4625280"/>
+            <a:ext cx="4197960" cy="4624920"/>
           </a:xfrm>
           <a:prstGeom prst="roundRect">
             <a:avLst>
@@ -7050,6 +6634,7 @@
                   <a:srgbClr val="ffffff"/>
                 </a:solidFill>
                 <a:latin typeface="Calibri"/>
+                <a:ea typeface="DejaVu Sans"/>
               </a:rPr>
               <a:t>PIC</a:t>
             </a:r>
@@ -7061,14 +6646,14 @@
       </p:sp>
       <p:sp>
         <p:nvSpPr>
-          <p:cNvPr id="73" name="Прямоугольник: скругленные углы 16"/>
+          <p:cNvPr id="72" name="Прямоугольник: скругленные углы 16"/>
           <p:cNvSpPr/>
           <p:nvPr/>
         </p:nvSpPr>
         <p:spPr>
           <a:xfrm>
             <a:off x="329400" y="257040"/>
-            <a:ext cx="4198320" cy="4625280"/>
+            <a:ext cx="4197960" cy="4624920"/>
           </a:xfrm>
           <a:prstGeom prst="roundRect">
             <a:avLst>
@@ -7102,14 +6687,14 @@
       </p:sp>
       <p:sp>
         <p:nvSpPr>
-          <p:cNvPr id="74" name="Овал 9"/>
+          <p:cNvPr id="73" name="Овал 9"/>
           <p:cNvSpPr/>
           <p:nvPr/>
         </p:nvSpPr>
         <p:spPr>
           <a:xfrm>
             <a:off x="4272120" y="1193040"/>
-            <a:ext cx="635400" cy="635400"/>
+            <a:ext cx="635040" cy="635040"/>
           </a:xfrm>
           <a:prstGeom prst="ellipse">
             <a:avLst/>
@@ -7138,14 +6723,14 @@
       </p:sp>
       <p:sp>
         <p:nvSpPr>
-          <p:cNvPr id="75" name="TextBox 10"/>
+          <p:cNvPr id="74" name="TextBox 10"/>
           <p:cNvSpPr/>
           <p:nvPr/>
         </p:nvSpPr>
         <p:spPr>
           <a:xfrm>
             <a:off x="581760" y="828720"/>
-            <a:ext cx="3693600" cy="550800"/>
+            <a:ext cx="3693240" cy="550440"/>
           </a:xfrm>
           <a:prstGeom prst="rect">
             <a:avLst/>
@@ -7200,14 +6785,14 @@
       </p:sp>
       <p:sp>
         <p:nvSpPr>
-          <p:cNvPr id="76" name="TextBox 10"/>
+          <p:cNvPr id="75" name="TextBox 10"/>
           <p:cNvSpPr/>
           <p:nvPr/>
         </p:nvSpPr>
         <p:spPr>
           <a:xfrm>
             <a:off x="581760" y="1364400"/>
-            <a:ext cx="3693600" cy="789840"/>
+            <a:ext cx="3693240" cy="789480"/>
           </a:xfrm>
           <a:prstGeom prst="rect">
             <a:avLst/>
@@ -7262,14 +6847,14 @@
       </p:sp>
       <p:sp>
         <p:nvSpPr>
-          <p:cNvPr id="77" name="TextBox 10"/>
+          <p:cNvPr id="76" name="TextBox 10"/>
           <p:cNvSpPr/>
           <p:nvPr/>
         </p:nvSpPr>
         <p:spPr>
           <a:xfrm>
             <a:off x="578160" y="2154600"/>
-            <a:ext cx="3693600" cy="550800"/>
+            <a:ext cx="3693240" cy="550440"/>
           </a:xfrm>
           <a:prstGeom prst="rect">
             <a:avLst/>
@@ -7314,14 +6899,14 @@
       </p:sp>
       <p:sp>
         <p:nvSpPr>
-          <p:cNvPr id="78" name="TextBox 10"/>
+          <p:cNvPr id="77" name="TextBox 10"/>
           <p:cNvSpPr/>
           <p:nvPr/>
         </p:nvSpPr>
         <p:spPr>
           <a:xfrm>
             <a:off x="578160" y="2687040"/>
-            <a:ext cx="3693600" cy="843480"/>
+            <a:ext cx="3693240" cy="843120"/>
           </a:xfrm>
           <a:prstGeom prst="rect">
             <a:avLst/>
@@ -7376,14 +6961,14 @@
       </p:sp>
       <p:sp>
         <p:nvSpPr>
-          <p:cNvPr id="79" name="TextBox 10"/>
+          <p:cNvPr id="78" name="TextBox 10"/>
           <p:cNvSpPr/>
           <p:nvPr/>
         </p:nvSpPr>
         <p:spPr>
           <a:xfrm>
             <a:off x="578160" y="3482280"/>
-            <a:ext cx="3693600" cy="550800"/>
+            <a:ext cx="3693240" cy="550440"/>
           </a:xfrm>
           <a:prstGeom prst="rect">
             <a:avLst/>
@@ -7428,14 +7013,14 @@
       </p:sp>
       <p:sp>
         <p:nvSpPr>
-          <p:cNvPr id="80" name="TextBox 10"/>
+          <p:cNvPr id="79" name="TextBox 10"/>
           <p:cNvSpPr/>
           <p:nvPr/>
         </p:nvSpPr>
         <p:spPr>
           <a:xfrm>
             <a:off x="578160" y="4015080"/>
-            <a:ext cx="3693600" cy="794880"/>
+            <a:ext cx="3693240" cy="794520"/>
           </a:xfrm>
           <a:prstGeom prst="rect">
             <a:avLst/>
@@ -7490,14 +7075,14 @@
       </p:sp>
       <p:sp>
         <p:nvSpPr>
-          <p:cNvPr id="81" name="TextBox 30"/>
+          <p:cNvPr id="80" name="TextBox 30"/>
           <p:cNvSpPr/>
           <p:nvPr/>
         </p:nvSpPr>
         <p:spPr>
           <a:xfrm>
             <a:off x="553680" y="352440"/>
-            <a:ext cx="3803760" cy="789840"/>
+            <a:ext cx="3803400" cy="789480"/>
           </a:xfrm>
           <a:prstGeom prst="rect">
             <a:avLst/>
@@ -7530,6 +7115,7 @@
                   <a:srgbClr val="ffffff"/>
                 </a:solidFill>
                 <a:latin typeface="Arial"/>
+                <a:ea typeface="DejaVu Sans"/>
               </a:rPr>
               <a:t>TITLE</a:t>
             </a:r>
@@ -7578,14 +7164,14 @@
       </p:grpSpPr>
       <p:sp>
         <p:nvSpPr>
-          <p:cNvPr id="82" name="TextBox 20"/>
+          <p:cNvPr id="81" name="TextBox 20"/>
           <p:cNvSpPr/>
           <p:nvPr/>
         </p:nvSpPr>
         <p:spPr>
           <a:xfrm>
             <a:off x="516960" y="411840"/>
-            <a:ext cx="8465760" cy="480960"/>
+            <a:ext cx="8465400" cy="480600"/>
           </a:xfrm>
           <a:prstGeom prst="rect">
             <a:avLst/>
@@ -7618,6 +7204,7 @@
                   <a:srgbClr val="ffffff"/>
                 </a:solidFill>
                 <a:latin typeface="Arial"/>
+                <a:ea typeface="DejaVu Sans"/>
               </a:rPr>
               <a:t>TITLE</a:t>
             </a:r>
@@ -7629,14 +7216,14 @@
       </p:sp>
       <p:sp>
         <p:nvSpPr>
-          <p:cNvPr id="83" name="Прямоугольник со скругленными углами 3"/>
+          <p:cNvPr id="82" name="Прямоугольник со скругленными углами 3"/>
           <p:cNvSpPr/>
           <p:nvPr/>
         </p:nvSpPr>
         <p:spPr>
           <a:xfrm>
             <a:off x="456480" y="1406160"/>
-            <a:ext cx="2300760" cy="1440000"/>
+            <a:ext cx="2300400" cy="1439640"/>
           </a:xfrm>
           <a:prstGeom prst="roundRect">
             <a:avLst>
@@ -7695,14 +7282,14 @@
       </p:sp>
       <p:sp>
         <p:nvSpPr>
-          <p:cNvPr id="84" name="TextBox 10"/>
+          <p:cNvPr id="83" name="TextBox 10"/>
           <p:cNvSpPr/>
           <p:nvPr/>
         </p:nvSpPr>
         <p:spPr>
           <a:xfrm>
             <a:off x="384840" y="3013560"/>
-            <a:ext cx="2429280" cy="713880"/>
+            <a:ext cx="2428920" cy="713520"/>
           </a:xfrm>
           <a:prstGeom prst="rect">
             <a:avLst/>
@@ -7747,14 +7334,14 @@
       </p:sp>
       <p:sp>
         <p:nvSpPr>
-          <p:cNvPr id="85" name="TextBox 10"/>
+          <p:cNvPr id="84" name="TextBox 10"/>
           <p:cNvSpPr/>
           <p:nvPr/>
         </p:nvSpPr>
         <p:spPr>
           <a:xfrm>
             <a:off x="384840" y="3798000"/>
-            <a:ext cx="2429280" cy="1037880"/>
+            <a:ext cx="2428920" cy="1037520"/>
           </a:xfrm>
           <a:prstGeom prst="rect">
             <a:avLst/>
@@ -7809,14 +7396,14 @@
       </p:sp>
       <p:sp>
         <p:nvSpPr>
-          <p:cNvPr id="86" name="Прямоугольник: скругленные углы 1"/>
+          <p:cNvPr id="85" name="Прямоугольник: скругленные углы 1"/>
           <p:cNvSpPr/>
           <p:nvPr/>
         </p:nvSpPr>
         <p:spPr>
           <a:xfrm>
             <a:off x="328680" y="228600"/>
-            <a:ext cx="8501400" cy="813960"/>
+            <a:ext cx="8501040" cy="813600"/>
           </a:xfrm>
           <a:prstGeom prst="roundRect">
             <a:avLst>
@@ -7847,14 +7434,14 @@
       </p:sp>
       <p:sp>
         <p:nvSpPr>
-          <p:cNvPr id="87" name="Прямоугольник: скругленные углы 10"/>
+          <p:cNvPr id="86" name="Прямоугольник: скругленные углы 10"/>
           <p:cNvSpPr/>
           <p:nvPr/>
         </p:nvSpPr>
         <p:spPr>
           <a:xfrm>
             <a:off x="328680" y="1279080"/>
-            <a:ext cx="2557080" cy="3642840"/>
+            <a:ext cx="2556720" cy="3642480"/>
           </a:xfrm>
           <a:prstGeom prst="roundRect">
             <a:avLst>
@@ -7885,14 +7472,14 @@
       </p:sp>
       <p:sp>
         <p:nvSpPr>
-          <p:cNvPr id="88" name="Прямоугольник со скругленными углами 3"/>
+          <p:cNvPr id="87" name="Прямоугольник со скругленными углами 3"/>
           <p:cNvSpPr/>
           <p:nvPr/>
         </p:nvSpPr>
         <p:spPr>
           <a:xfrm>
             <a:off x="3421080" y="1398960"/>
-            <a:ext cx="2300760" cy="1440000"/>
+            <a:ext cx="2300400" cy="1439640"/>
           </a:xfrm>
           <a:prstGeom prst="roundRect">
             <a:avLst>
@@ -7951,14 +7538,14 @@
       </p:sp>
       <p:sp>
         <p:nvSpPr>
-          <p:cNvPr id="89" name="TextBox 10"/>
+          <p:cNvPr id="88" name="TextBox 10"/>
           <p:cNvSpPr/>
           <p:nvPr/>
         </p:nvSpPr>
         <p:spPr>
           <a:xfrm>
             <a:off x="3349440" y="3013560"/>
-            <a:ext cx="2429280" cy="713880"/>
+            <a:ext cx="2428920" cy="713520"/>
           </a:xfrm>
           <a:prstGeom prst="rect">
             <a:avLst/>
@@ -8013,14 +7600,14 @@
       </p:sp>
       <p:sp>
         <p:nvSpPr>
-          <p:cNvPr id="90" name="TextBox 10"/>
+          <p:cNvPr id="89" name="TextBox 10"/>
           <p:cNvSpPr/>
           <p:nvPr/>
         </p:nvSpPr>
         <p:spPr>
           <a:xfrm>
             <a:off x="3349440" y="3798000"/>
-            <a:ext cx="2429280" cy="1037880"/>
+            <a:ext cx="2428920" cy="1037520"/>
           </a:xfrm>
           <a:prstGeom prst="rect">
             <a:avLst/>
@@ -8075,14 +7662,14 @@
       </p:sp>
       <p:sp>
         <p:nvSpPr>
-          <p:cNvPr id="91" name="Прямоугольник: скругленные углы 14"/>
+          <p:cNvPr id="90" name="Прямоугольник: скругленные углы 14"/>
           <p:cNvSpPr/>
           <p:nvPr/>
         </p:nvSpPr>
         <p:spPr>
           <a:xfrm>
             <a:off x="3293280" y="1271880"/>
-            <a:ext cx="2557080" cy="3642840"/>
+            <a:ext cx="2556720" cy="3642480"/>
           </a:xfrm>
           <a:prstGeom prst="roundRect">
             <a:avLst>
@@ -8113,14 +7700,14 @@
       </p:sp>
       <p:sp>
         <p:nvSpPr>
-          <p:cNvPr id="92" name="Прямоугольник со скругленными углами 3"/>
+          <p:cNvPr id="91" name="Прямоугольник со скругленными углами 3"/>
           <p:cNvSpPr/>
           <p:nvPr/>
         </p:nvSpPr>
         <p:spPr>
           <a:xfrm>
             <a:off x="6400800" y="1379520"/>
-            <a:ext cx="2300760" cy="1440000"/>
+            <a:ext cx="2300400" cy="1439640"/>
           </a:xfrm>
           <a:prstGeom prst="roundRect">
             <a:avLst>
@@ -8179,14 +7766,14 @@
       </p:sp>
       <p:sp>
         <p:nvSpPr>
-          <p:cNvPr id="93" name="TextBox 10"/>
+          <p:cNvPr id="92" name="TextBox 10"/>
           <p:cNvSpPr/>
           <p:nvPr/>
         </p:nvSpPr>
         <p:spPr>
           <a:xfrm>
             <a:off x="6329520" y="3013560"/>
-            <a:ext cx="2429280" cy="713880"/>
+            <a:ext cx="2428920" cy="713520"/>
           </a:xfrm>
           <a:prstGeom prst="rect">
             <a:avLst/>
@@ -8241,14 +7828,14 @@
       </p:sp>
       <p:sp>
         <p:nvSpPr>
-          <p:cNvPr id="94" name="TextBox 10"/>
+          <p:cNvPr id="93" name="TextBox 10"/>
           <p:cNvSpPr/>
           <p:nvPr/>
         </p:nvSpPr>
         <p:spPr>
           <a:xfrm>
             <a:off x="6329520" y="3798000"/>
-            <a:ext cx="2429280" cy="1037880"/>
+            <a:ext cx="2428920" cy="1037520"/>
           </a:xfrm>
           <a:prstGeom prst="rect">
             <a:avLst/>
@@ -8303,14 +7890,14 @@
       </p:sp>
       <p:sp>
         <p:nvSpPr>
-          <p:cNvPr id="95" name="Прямоугольник: скругленные углы 19"/>
+          <p:cNvPr id="94" name="Прямоугольник: скругленные углы 19"/>
           <p:cNvSpPr/>
           <p:nvPr/>
         </p:nvSpPr>
         <p:spPr>
           <a:xfrm>
             <a:off x="6273000" y="1252800"/>
-            <a:ext cx="2557080" cy="3642840"/>
+            <a:ext cx="2556720" cy="3642480"/>
           </a:xfrm>
           <a:prstGeom prst="roundRect">
             <a:avLst>
@@ -8378,14 +7965,14 @@
       </p:grpSpPr>
       <p:sp>
         <p:nvSpPr>
-          <p:cNvPr id="96" name="Прямоугольник со скругленными углами 3"/>
+          <p:cNvPr id="95" name="Прямоугольник со скругленными углами 3"/>
           <p:cNvSpPr/>
           <p:nvPr/>
         </p:nvSpPr>
         <p:spPr>
           <a:xfrm>
             <a:off x="0" y="0"/>
-            <a:ext cx="3396960" cy="5143320"/>
+            <a:ext cx="3396600" cy="5142960"/>
           </a:xfrm>
           <a:prstGeom prst="roundRect">
             <a:avLst>
@@ -8444,14 +8031,14 @@
       </p:sp>
       <p:sp>
         <p:nvSpPr>
-          <p:cNvPr id="97" name="TextBox 10"/>
+          <p:cNvPr id="96" name="TextBox 10"/>
           <p:cNvSpPr/>
           <p:nvPr/>
         </p:nvSpPr>
         <p:spPr>
           <a:xfrm>
             <a:off x="4192560" y="3830040"/>
-            <a:ext cx="4672440" cy="329040"/>
+            <a:ext cx="4672080" cy="328680"/>
           </a:xfrm>
           <a:prstGeom prst="rect">
             <a:avLst/>
@@ -8496,14 +8083,14 @@
       </p:sp>
       <p:sp>
         <p:nvSpPr>
-          <p:cNvPr id="98" name="TextBox 10"/>
+          <p:cNvPr id="97" name="TextBox 10"/>
           <p:cNvSpPr/>
           <p:nvPr/>
         </p:nvSpPr>
         <p:spPr>
           <a:xfrm>
             <a:off x="4192560" y="4188600"/>
-            <a:ext cx="4672440" cy="713880"/>
+            <a:ext cx="4672080" cy="713520"/>
           </a:xfrm>
           <a:prstGeom prst="rect">
             <a:avLst/>
@@ -8558,14 +8145,14 @@
       </p:sp>
       <p:sp>
         <p:nvSpPr>
-          <p:cNvPr id="99" name="Овал 9"/>
+          <p:cNvPr id="98" name="Овал 9"/>
           <p:cNvSpPr/>
           <p:nvPr/>
         </p:nvSpPr>
         <p:spPr>
           <a:xfrm>
             <a:off x="3724560" y="3830040"/>
-            <a:ext cx="403200" cy="403200"/>
+            <a:ext cx="402840" cy="402840"/>
           </a:xfrm>
           <a:prstGeom prst="ellipse">
             <a:avLst/>
@@ -8608,6 +8195,7 @@
                   <a:srgbClr val="ffffff"/>
                 </a:solidFill>
                 <a:latin typeface="Calibri"/>
+                <a:ea typeface="DejaVu Sans"/>
               </a:rPr>
               <a:t>03</a:t>
             </a:r>
@@ -8619,14 +8207,14 @@
       </p:sp>
       <p:sp>
         <p:nvSpPr>
-          <p:cNvPr id="100" name="TextBox 10"/>
+          <p:cNvPr id="99" name="TextBox 10"/>
           <p:cNvSpPr/>
           <p:nvPr/>
         </p:nvSpPr>
         <p:spPr>
           <a:xfrm>
             <a:off x="4192560" y="2571840"/>
-            <a:ext cx="4672440" cy="329040"/>
+            <a:ext cx="4672080" cy="328680"/>
           </a:xfrm>
           <a:prstGeom prst="rect">
             <a:avLst/>
@@ -8681,14 +8269,14 @@
       </p:sp>
       <p:sp>
         <p:nvSpPr>
-          <p:cNvPr id="101" name="TextBox 10"/>
+          <p:cNvPr id="100" name="TextBox 10"/>
           <p:cNvSpPr/>
           <p:nvPr/>
         </p:nvSpPr>
         <p:spPr>
           <a:xfrm>
             <a:off x="4192560" y="2930400"/>
-            <a:ext cx="4672440" cy="713880"/>
+            <a:ext cx="4672080" cy="713520"/>
           </a:xfrm>
           <a:prstGeom prst="rect">
             <a:avLst/>
@@ -8743,14 +8331,14 @@
       </p:sp>
       <p:sp>
         <p:nvSpPr>
-          <p:cNvPr id="102" name="Овал 13"/>
+          <p:cNvPr id="101" name="Овал 13"/>
           <p:cNvSpPr/>
           <p:nvPr/>
         </p:nvSpPr>
         <p:spPr>
           <a:xfrm>
             <a:off x="3724560" y="2571840"/>
-            <a:ext cx="403200" cy="403200"/>
+            <a:ext cx="402840" cy="402840"/>
           </a:xfrm>
           <a:prstGeom prst="ellipse">
             <a:avLst/>
@@ -8793,6 +8381,7 @@
                   <a:srgbClr val="ffffff"/>
                 </a:solidFill>
                 <a:latin typeface="Calibri"/>
+                <a:ea typeface="DejaVu Sans"/>
               </a:rPr>
               <a:t>02</a:t>
             </a:r>
@@ -8804,14 +8393,14 @@
       </p:sp>
       <p:sp>
         <p:nvSpPr>
-          <p:cNvPr id="103" name="TextBox 10"/>
+          <p:cNvPr id="102" name="TextBox 10"/>
           <p:cNvSpPr/>
           <p:nvPr/>
         </p:nvSpPr>
         <p:spPr>
           <a:xfrm>
             <a:off x="4192560" y="1311840"/>
-            <a:ext cx="4672440" cy="329040"/>
+            <a:ext cx="4672080" cy="328680"/>
           </a:xfrm>
           <a:prstGeom prst="rect">
             <a:avLst/>
@@ -8866,14 +8455,14 @@
       </p:sp>
       <p:sp>
         <p:nvSpPr>
-          <p:cNvPr id="104" name="TextBox 10"/>
+          <p:cNvPr id="103" name="TextBox 10"/>
           <p:cNvSpPr/>
           <p:nvPr/>
         </p:nvSpPr>
         <p:spPr>
           <a:xfrm>
             <a:off x="4192560" y="1670760"/>
-            <a:ext cx="4672440" cy="713880"/>
+            <a:ext cx="4672080" cy="713520"/>
           </a:xfrm>
           <a:prstGeom prst="rect">
             <a:avLst/>
@@ -8928,14 +8517,14 @@
       </p:sp>
       <p:sp>
         <p:nvSpPr>
-          <p:cNvPr id="105" name="Овал 16"/>
+          <p:cNvPr id="104" name="Овал 16"/>
           <p:cNvSpPr/>
           <p:nvPr/>
         </p:nvSpPr>
         <p:spPr>
           <a:xfrm>
             <a:off x="3724560" y="1311840"/>
-            <a:ext cx="403200" cy="403200"/>
+            <a:ext cx="402840" cy="402840"/>
           </a:xfrm>
           <a:prstGeom prst="ellipse">
             <a:avLst/>
@@ -8978,6 +8567,7 @@
                   <a:srgbClr val="ffffff"/>
                 </a:solidFill>
                 <a:latin typeface="Calibri"/>
+                <a:ea typeface="DejaVu Sans"/>
               </a:rPr>
               <a:t>01</a:t>
             </a:r>
@@ -8989,14 +8579,14 @@
       </p:sp>
       <p:sp>
         <p:nvSpPr>
-          <p:cNvPr id="106" name="TextBox 17"/>
+          <p:cNvPr id="105" name="TextBox 17"/>
           <p:cNvSpPr/>
           <p:nvPr/>
         </p:nvSpPr>
         <p:spPr>
           <a:xfrm>
             <a:off x="3607560" y="215280"/>
-            <a:ext cx="5375160" cy="909720"/>
+            <a:ext cx="5374800" cy="909360"/>
           </a:xfrm>
           <a:prstGeom prst="rect">
             <a:avLst/>
@@ -9029,6 +8619,7 @@
                   <a:srgbClr val="ffffff"/>
                 </a:solidFill>
                 <a:latin typeface="Arial"/>
+                <a:ea typeface="DejaVu Sans"/>
               </a:rPr>
               <a:t>TITLE</a:t>
             </a:r>
@@ -9077,14 +8668,14 @@
       </p:grpSpPr>
       <p:sp>
         <p:nvSpPr>
-          <p:cNvPr id="107" name="Прямоугольник: скругленные углы 22"/>
+          <p:cNvPr id="106" name="Прямоугольник: скругленные углы 22"/>
           <p:cNvSpPr/>
           <p:nvPr/>
         </p:nvSpPr>
         <p:spPr>
           <a:xfrm>
             <a:off x="3417120" y="1051560"/>
-            <a:ext cx="5047920" cy="841680"/>
+            <a:ext cx="5047560" cy="841320"/>
           </a:xfrm>
           <a:prstGeom prst="roundRect">
             <a:avLst>
@@ -9115,14 +8706,14 @@
       </p:sp>
       <p:sp>
         <p:nvSpPr>
-          <p:cNvPr id="108" name="Прямоугольник: скругленные углы 28"/>
+          <p:cNvPr id="107" name="Прямоугольник: скругленные углы 28"/>
           <p:cNvSpPr/>
           <p:nvPr/>
         </p:nvSpPr>
         <p:spPr>
           <a:xfrm>
             <a:off x="3417120" y="2451960"/>
-            <a:ext cx="5047920" cy="841680"/>
+            <a:ext cx="5047560" cy="841320"/>
           </a:xfrm>
           <a:prstGeom prst="roundRect">
             <a:avLst>
@@ -9153,14 +8744,14 @@
       </p:sp>
       <p:sp>
         <p:nvSpPr>
-          <p:cNvPr id="109" name="Прямоугольник: скругленные углы 32"/>
+          <p:cNvPr id="108" name="Прямоугольник: скругленные углы 32"/>
           <p:cNvSpPr/>
           <p:nvPr/>
         </p:nvSpPr>
         <p:spPr>
           <a:xfrm>
             <a:off x="3417120" y="3849840"/>
-            <a:ext cx="5047920" cy="841680"/>
+            <a:ext cx="5047560" cy="841320"/>
           </a:xfrm>
           <a:prstGeom prst="roundRect">
             <a:avLst>
@@ -9191,14 +8782,14 @@
       </p:sp>
       <p:sp>
         <p:nvSpPr>
-          <p:cNvPr id="110" name="TextBox 10"/>
+          <p:cNvPr id="109" name="TextBox 10"/>
           <p:cNvSpPr/>
           <p:nvPr/>
         </p:nvSpPr>
         <p:spPr>
           <a:xfrm>
             <a:off x="3821760" y="1115280"/>
-            <a:ext cx="4483800" cy="713880"/>
+            <a:ext cx="4483440" cy="713520"/>
           </a:xfrm>
           <a:prstGeom prst="rect">
             <a:avLst/>
@@ -9253,7 +8844,7 @@
       </p:sp>
       <p:sp>
         <p:nvSpPr>
-          <p:cNvPr id="111" name="Прямая соединительная линия 4"/>
+          <p:cNvPr id="110" name="Прямая соединительная линия 4"/>
           <p:cNvSpPr/>
           <p:nvPr/>
         </p:nvSpPr>
@@ -9286,14 +8877,14 @@
       </p:sp>
       <p:sp>
         <p:nvSpPr>
-          <p:cNvPr id="112" name="Прямоугольник: скругленные углы 19"/>
+          <p:cNvPr id="111" name="Прямоугольник: скругленные углы 19"/>
           <p:cNvSpPr/>
           <p:nvPr/>
         </p:nvSpPr>
         <p:spPr>
           <a:xfrm>
             <a:off x="1135800" y="1033200"/>
-            <a:ext cx="2642760" cy="880920"/>
+            <a:ext cx="2642400" cy="880560"/>
           </a:xfrm>
           <a:prstGeom prst="roundRect">
             <a:avLst>
@@ -9324,14 +8915,14 @@
       </p:sp>
       <p:sp>
         <p:nvSpPr>
-          <p:cNvPr id="113" name="TextBox 10"/>
+          <p:cNvPr id="112" name="TextBox 10"/>
           <p:cNvSpPr/>
           <p:nvPr/>
         </p:nvSpPr>
         <p:spPr>
           <a:xfrm>
             <a:off x="1164600" y="1033200"/>
-            <a:ext cx="2546280" cy="880920"/>
+            <a:ext cx="2545920" cy="880560"/>
           </a:xfrm>
           <a:prstGeom prst="rect">
             <a:avLst/>
@@ -9386,14 +8977,14 @@
       </p:sp>
       <p:sp>
         <p:nvSpPr>
-          <p:cNvPr id="114" name="TextBox 10"/>
+          <p:cNvPr id="113" name="TextBox 10"/>
           <p:cNvSpPr/>
           <p:nvPr/>
         </p:nvSpPr>
         <p:spPr>
           <a:xfrm>
             <a:off x="3821760" y="2515680"/>
-            <a:ext cx="4483800" cy="713880"/>
+            <a:ext cx="4483440" cy="713520"/>
           </a:xfrm>
           <a:prstGeom prst="rect">
             <a:avLst/>
@@ -9448,14 +9039,14 @@
       </p:sp>
       <p:sp>
         <p:nvSpPr>
-          <p:cNvPr id="115" name="Прямоугольник: скругленные углы 26"/>
+          <p:cNvPr id="114" name="Прямоугольник: скругленные углы 26"/>
           <p:cNvSpPr/>
           <p:nvPr/>
         </p:nvSpPr>
         <p:spPr>
           <a:xfrm>
             <a:off x="1135800" y="2433600"/>
-            <a:ext cx="2642760" cy="880920"/>
+            <a:ext cx="2642400" cy="880560"/>
           </a:xfrm>
           <a:prstGeom prst="roundRect">
             <a:avLst>
@@ -9486,14 +9077,14 @@
       </p:sp>
       <p:sp>
         <p:nvSpPr>
-          <p:cNvPr id="116" name="TextBox 10"/>
+          <p:cNvPr id="115" name="TextBox 10"/>
           <p:cNvSpPr/>
           <p:nvPr/>
         </p:nvSpPr>
         <p:spPr>
           <a:xfrm>
             <a:off x="1164600" y="2433600"/>
-            <a:ext cx="2546280" cy="880920"/>
+            <a:ext cx="2545920" cy="880560"/>
           </a:xfrm>
           <a:prstGeom prst="rect">
             <a:avLst/>
@@ -9548,14 +9139,14 @@
       </p:sp>
       <p:sp>
         <p:nvSpPr>
-          <p:cNvPr id="117" name="TextBox 10"/>
+          <p:cNvPr id="116" name="TextBox 10"/>
           <p:cNvSpPr/>
           <p:nvPr/>
         </p:nvSpPr>
         <p:spPr>
           <a:xfrm>
             <a:off x="3821760" y="3913560"/>
-            <a:ext cx="4483800" cy="713880"/>
+            <a:ext cx="4483440" cy="713520"/>
           </a:xfrm>
           <a:prstGeom prst="rect">
             <a:avLst/>
@@ -9610,14 +9201,14 @@
       </p:sp>
       <p:sp>
         <p:nvSpPr>
-          <p:cNvPr id="118" name="Прямоугольник: скругленные углы 30"/>
+          <p:cNvPr id="117" name="Прямоугольник: скругленные углы 30"/>
           <p:cNvSpPr/>
           <p:nvPr/>
         </p:nvSpPr>
         <p:spPr>
           <a:xfrm>
             <a:off x="1135800" y="3831480"/>
-            <a:ext cx="2642760" cy="880920"/>
+            <a:ext cx="2642400" cy="880560"/>
           </a:xfrm>
           <a:prstGeom prst="roundRect">
             <a:avLst>
@@ -9648,14 +9239,14 @@
       </p:sp>
       <p:sp>
         <p:nvSpPr>
-          <p:cNvPr id="119" name="TextBox 10"/>
+          <p:cNvPr id="118" name="TextBox 10"/>
           <p:cNvSpPr/>
           <p:nvPr/>
         </p:nvSpPr>
         <p:spPr>
           <a:xfrm>
             <a:off x="1164600" y="3831480"/>
-            <a:ext cx="2546280" cy="880920"/>
+            <a:ext cx="2545920" cy="880560"/>
           </a:xfrm>
           <a:prstGeom prst="rect">
             <a:avLst/>
@@ -9710,14 +9301,14 @@
       </p:sp>
       <p:sp>
         <p:nvSpPr>
-          <p:cNvPr id="120" name="Овал 5"/>
+          <p:cNvPr id="119" name="Овал 5"/>
           <p:cNvSpPr/>
           <p:nvPr/>
         </p:nvSpPr>
         <p:spPr>
           <a:xfrm>
             <a:off x="675360" y="1365840"/>
-            <a:ext cx="221040" cy="221040"/>
+            <a:ext cx="220680" cy="220680"/>
           </a:xfrm>
           <a:prstGeom prst="ellipse">
             <a:avLst/>
@@ -9751,14 +9342,14 @@
       </p:sp>
       <p:sp>
         <p:nvSpPr>
-          <p:cNvPr id="121" name="Овал 33"/>
+          <p:cNvPr id="120" name="Овал 33"/>
           <p:cNvSpPr/>
           <p:nvPr/>
         </p:nvSpPr>
         <p:spPr>
           <a:xfrm>
             <a:off x="675360" y="2728080"/>
-            <a:ext cx="221040" cy="221040"/>
+            <a:ext cx="220680" cy="220680"/>
           </a:xfrm>
           <a:prstGeom prst="ellipse">
             <a:avLst/>
@@ -9792,14 +9383,14 @@
       </p:sp>
       <p:sp>
         <p:nvSpPr>
-          <p:cNvPr id="122" name="Овал 34"/>
+          <p:cNvPr id="121" name="Овал 34"/>
           <p:cNvSpPr/>
           <p:nvPr/>
         </p:nvSpPr>
         <p:spPr>
           <a:xfrm>
             <a:off x="671760" y="4156200"/>
-            <a:ext cx="221040" cy="221040"/>
+            <a:ext cx="220680" cy="220680"/>
           </a:xfrm>
           <a:prstGeom prst="ellipse">
             <a:avLst/>
@@ -9833,14 +9424,14 @@
       </p:sp>
       <p:sp>
         <p:nvSpPr>
-          <p:cNvPr id="123" name="TextBox 20"/>
+          <p:cNvPr id="122" name="TextBox 20"/>
           <p:cNvSpPr/>
           <p:nvPr/>
         </p:nvSpPr>
         <p:spPr>
           <a:xfrm>
             <a:off x="381600" y="271080"/>
-            <a:ext cx="8465760" cy="480960"/>
+            <a:ext cx="8465400" cy="480600"/>
           </a:xfrm>
           <a:prstGeom prst="rect">
             <a:avLst/>
@@ -9873,6 +9464,7 @@
                   <a:srgbClr val="ffffff"/>
                 </a:solidFill>
                 <a:latin typeface="Arial"/>
+                <a:ea typeface="DejaVu Sans"/>
               </a:rPr>
               <a:t>TITLE</a:t>
             </a:r>
@@ -9921,14 +9513,14 @@
       </p:grpSpPr>
       <p:sp>
         <p:nvSpPr>
-          <p:cNvPr id="124" name="Прямоугольник со скругленными углами 3"/>
+          <p:cNvPr id="123" name="Прямоугольник со скругленными углами 3"/>
           <p:cNvSpPr/>
           <p:nvPr/>
         </p:nvSpPr>
         <p:spPr>
           <a:xfrm>
             <a:off x="0" y="3181680"/>
-            <a:ext cx="9143640" cy="1961640"/>
+            <a:ext cx="9143280" cy="1961280"/>
           </a:xfrm>
           <a:prstGeom prst="roundRect">
             <a:avLst>
@@ -9987,14 +9579,14 @@
       </p:sp>
       <p:sp>
         <p:nvSpPr>
-          <p:cNvPr id="125" name="TextBox 10"/>
+          <p:cNvPr id="124" name="TextBox 10"/>
           <p:cNvSpPr/>
           <p:nvPr/>
         </p:nvSpPr>
         <p:spPr>
           <a:xfrm>
             <a:off x="384840" y="801360"/>
-            <a:ext cx="2443680" cy="713880"/>
+            <a:ext cx="2443320" cy="713520"/>
           </a:xfrm>
           <a:prstGeom prst="rect">
             <a:avLst/>
@@ -10039,14 +9631,14 @@
       </p:sp>
       <p:sp>
         <p:nvSpPr>
-          <p:cNvPr id="126" name="TextBox 10"/>
+          <p:cNvPr id="125" name="TextBox 10"/>
           <p:cNvSpPr/>
           <p:nvPr/>
         </p:nvSpPr>
         <p:spPr>
           <a:xfrm>
             <a:off x="384840" y="1585800"/>
-            <a:ext cx="2443680" cy="1565280"/>
+            <a:ext cx="2443320" cy="1564920"/>
           </a:xfrm>
           <a:prstGeom prst="rect">
             <a:avLst/>
@@ -10101,14 +9693,14 @@
       </p:sp>
       <p:sp>
         <p:nvSpPr>
-          <p:cNvPr id="127" name="TextBox 10"/>
+          <p:cNvPr id="126" name="TextBox 10"/>
           <p:cNvSpPr/>
           <p:nvPr/>
         </p:nvSpPr>
         <p:spPr>
           <a:xfrm>
             <a:off x="3269880" y="801360"/>
-            <a:ext cx="2443680" cy="713880"/>
+            <a:ext cx="2443320" cy="713520"/>
           </a:xfrm>
           <a:prstGeom prst="rect">
             <a:avLst/>
@@ -10153,14 +9745,14 @@
       </p:sp>
       <p:sp>
         <p:nvSpPr>
-          <p:cNvPr id="128" name="TextBox 10"/>
+          <p:cNvPr id="127" name="TextBox 10"/>
           <p:cNvSpPr/>
           <p:nvPr/>
         </p:nvSpPr>
         <p:spPr>
           <a:xfrm>
             <a:off x="3269880" y="1585800"/>
-            <a:ext cx="2443680" cy="1565280"/>
+            <a:ext cx="2443320" cy="1564920"/>
           </a:xfrm>
           <a:prstGeom prst="rect">
             <a:avLst/>
@@ -10215,14 +9807,14 @@
       </p:sp>
       <p:sp>
         <p:nvSpPr>
-          <p:cNvPr id="129" name="TextBox 10"/>
+          <p:cNvPr id="128" name="TextBox 10"/>
           <p:cNvSpPr/>
           <p:nvPr/>
         </p:nvSpPr>
         <p:spPr>
           <a:xfrm>
             <a:off x="6154560" y="801360"/>
-            <a:ext cx="2665080" cy="713880"/>
+            <a:ext cx="2664720" cy="713520"/>
           </a:xfrm>
           <a:prstGeom prst="rect">
             <a:avLst/>
@@ -10267,14 +9859,14 @@
       </p:sp>
       <p:sp>
         <p:nvSpPr>
-          <p:cNvPr id="130" name="TextBox 10"/>
+          <p:cNvPr id="129" name="TextBox 10"/>
           <p:cNvSpPr/>
           <p:nvPr/>
         </p:nvSpPr>
         <p:spPr>
           <a:xfrm>
             <a:off x="6154560" y="1585800"/>
-            <a:ext cx="2665080" cy="1565280"/>
+            <a:ext cx="2664720" cy="1564920"/>
           </a:xfrm>
           <a:prstGeom prst="rect">
             <a:avLst/>
@@ -10329,7 +9921,7 @@
       </p:sp>
       <p:grpSp>
         <p:nvGrpSpPr>
-          <p:cNvPr id="131" name="Группа 8"/>
+          <p:cNvPr id="130" name="Группа 8"/>
           <p:cNvGrpSpPr/>
           <p:nvPr/>
         </p:nvGrpSpPr>
@@ -10343,7 +9935,7 @@
         </p:grpSpPr>
         <p:sp>
           <p:nvSpPr>
-            <p:cNvPr id="132" name="Прямая соединительная линия 7"/>
+            <p:cNvPr id="131" name="Прямая соединительная линия 7"/>
             <p:cNvSpPr/>
             <p:nvPr/>
           </p:nvSpPr>
@@ -10376,7 +9968,7 @@
         </p:sp>
         <p:sp>
           <p:nvSpPr>
-            <p:cNvPr id="133" name="Прямая соединительная линия 22"/>
+            <p:cNvPr id="132" name="Прямая соединительная линия 22"/>
             <p:cNvSpPr/>
             <p:nvPr/>
           </p:nvSpPr>
@@ -10410,7 +10002,7 @@
       </p:grpSp>
       <p:grpSp>
         <p:nvGrpSpPr>
-          <p:cNvPr id="134" name="Группа 23"/>
+          <p:cNvPr id="133" name="Группа 23"/>
           <p:cNvGrpSpPr/>
           <p:nvPr/>
         </p:nvGrpSpPr>
@@ -10424,7 +10016,7 @@
         </p:grpSpPr>
         <p:sp>
           <p:nvSpPr>
-            <p:cNvPr id="135" name="Прямая соединительная линия 30"/>
+            <p:cNvPr id="134" name="Прямая соединительная линия 30"/>
             <p:cNvSpPr/>
             <p:nvPr/>
           </p:nvSpPr>
@@ -10457,7 +10049,7 @@
         </p:sp>
         <p:sp>
           <p:nvSpPr>
-            <p:cNvPr id="136" name="Прямая соединительная линия 31"/>
+            <p:cNvPr id="135" name="Прямая соединительная линия 31"/>
             <p:cNvSpPr/>
             <p:nvPr/>
           </p:nvSpPr>
@@ -10491,28 +10083,40 @@
       </p:grpSp>
       <p:sp>
         <p:nvSpPr>
-          <p:cNvPr id="137" name=""/>
-          <p:cNvSpPr txBox="1"/>
+          <p:cNvPr id="136" name=""/>
+          <p:cNvSpPr/>
           <p:nvPr/>
         </p:nvSpPr>
         <p:spPr>
           <a:xfrm>
             <a:off x="349200" y="228600"/>
-            <a:ext cx="8229600" cy="346320"/>
-          </a:xfrm>
-          <a:prstGeom prst="rect">
-            <a:avLst/>
-          </a:prstGeom>
-          <a:noFill/>
-          <a:ln w="0">
-            <a:noFill/>
-          </a:ln>
-        </p:spPr>
+            <a:ext cx="8229240" cy="345960"/>
+          </a:xfrm>
+          <a:prstGeom prst="rect">
+            <a:avLst/>
+          </a:prstGeom>
+          <a:noFill/>
+          <a:ln w="0">
+            <a:noFill/>
+          </a:ln>
+        </p:spPr>
+        <p:style>
+          <a:lnRef idx="0"/>
+          <a:fillRef idx="0"/>
+          <a:effectRef idx="0"/>
+          <a:fontRef idx="minor"/>
+        </p:style>
         <p:txBody>
           <a:bodyPr lIns="90000" rIns="90000" tIns="45000" bIns="45000" anchor="t">
             <a:noAutofit/>
           </a:bodyPr>
           <a:p>
+            <a:pPr>
+              <a:lnSpc>
+                <a:spcPct val="100000"/>
+              </a:lnSpc>
+              <a:buNone/>
+            </a:pPr>
             <a:r>
               <a:rPr b="0" lang="en-US" sz="1800" spc="-1" strike="noStrike">
                 <a:latin typeface="Arial"/>
@@ -10564,14 +10168,14 @@
       </p:grpSpPr>
       <p:sp>
         <p:nvSpPr>
-          <p:cNvPr id="138" name="Прямоугольник со скругленными углами 3"/>
+          <p:cNvPr id="137" name="Прямоугольник со скругленными углами 3"/>
           <p:cNvSpPr/>
           <p:nvPr/>
         </p:nvSpPr>
         <p:spPr>
           <a:xfrm>
             <a:off x="5884200" y="0"/>
-            <a:ext cx="3259440" cy="5143320"/>
+            <a:ext cx="3259080" cy="5142960"/>
           </a:xfrm>
           <a:prstGeom prst="roundRect">
             <a:avLst>
@@ -10630,14 +10234,14 @@
       </p:sp>
       <p:sp>
         <p:nvSpPr>
-          <p:cNvPr id="139" name="Прямоугольник: скругленные углы 12"/>
+          <p:cNvPr id="138" name="Прямоугольник: скругленные углы 12"/>
           <p:cNvSpPr/>
           <p:nvPr/>
         </p:nvSpPr>
         <p:spPr>
           <a:xfrm>
             <a:off x="384840" y="3378240"/>
-            <a:ext cx="5236560" cy="1321200"/>
+            <a:ext cx="5236200" cy="1320840"/>
           </a:xfrm>
           <a:prstGeom prst="roundRect">
             <a:avLst>
@@ -10668,14 +10272,14 @@
       </p:sp>
       <p:sp>
         <p:nvSpPr>
-          <p:cNvPr id="140" name="Прямоугольник: скругленные углы 13"/>
+          <p:cNvPr id="139" name="Прямоугольник: скругленные углы 13"/>
           <p:cNvSpPr/>
           <p:nvPr/>
         </p:nvSpPr>
         <p:spPr>
           <a:xfrm>
             <a:off x="3091680" y="1135080"/>
-            <a:ext cx="2533320" cy="2057040"/>
+            <a:ext cx="2532960" cy="2056680"/>
           </a:xfrm>
           <a:prstGeom prst="roundRect">
             <a:avLst>
@@ -10706,14 +10310,14 @@
       </p:sp>
       <p:sp>
         <p:nvSpPr>
-          <p:cNvPr id="141" name="Прямоугольник: скругленные углы 14"/>
+          <p:cNvPr id="140" name="Прямоугольник: скругленные углы 14"/>
           <p:cNvSpPr/>
           <p:nvPr/>
         </p:nvSpPr>
         <p:spPr>
           <a:xfrm>
             <a:off x="387720" y="1120680"/>
-            <a:ext cx="2533320" cy="2057040"/>
+            <a:ext cx="2532960" cy="2056680"/>
           </a:xfrm>
           <a:prstGeom prst="roundRect">
             <a:avLst>
@@ -10744,14 +10348,14 @@
       </p:sp>
       <p:sp>
         <p:nvSpPr>
-          <p:cNvPr id="142" name="TextBox 10"/>
+          <p:cNvPr id="141" name="TextBox 10"/>
           <p:cNvSpPr/>
           <p:nvPr/>
         </p:nvSpPr>
         <p:spPr>
           <a:xfrm>
             <a:off x="476280" y="1176840"/>
-            <a:ext cx="2343600" cy="713880"/>
+            <a:ext cx="2343240" cy="713520"/>
           </a:xfrm>
           <a:prstGeom prst="rect">
             <a:avLst/>
@@ -10806,14 +10410,14 @@
       </p:sp>
       <p:sp>
         <p:nvSpPr>
-          <p:cNvPr id="143" name="TextBox 10"/>
+          <p:cNvPr id="142" name="TextBox 10"/>
           <p:cNvSpPr/>
           <p:nvPr/>
         </p:nvSpPr>
         <p:spPr>
           <a:xfrm>
             <a:off x="476280" y="1961280"/>
-            <a:ext cx="2343600" cy="1142280"/>
+            <a:ext cx="2343240" cy="1141920"/>
           </a:xfrm>
           <a:prstGeom prst="rect">
             <a:avLst/>
@@ -10868,14 +10472,14 @@
       </p:sp>
       <p:sp>
         <p:nvSpPr>
-          <p:cNvPr id="144" name="TextBox 10"/>
+          <p:cNvPr id="143" name="TextBox 10"/>
           <p:cNvSpPr/>
           <p:nvPr/>
         </p:nvSpPr>
         <p:spPr>
           <a:xfrm>
             <a:off x="3179880" y="1176840"/>
-            <a:ext cx="2340360" cy="713880"/>
+            <a:ext cx="2340000" cy="713520"/>
           </a:xfrm>
           <a:prstGeom prst="rect">
             <a:avLst/>
@@ -10920,14 +10524,14 @@
       </p:sp>
       <p:sp>
         <p:nvSpPr>
-          <p:cNvPr id="145" name="TextBox 10"/>
+          <p:cNvPr id="144" name="TextBox 10"/>
           <p:cNvSpPr/>
           <p:nvPr/>
         </p:nvSpPr>
         <p:spPr>
           <a:xfrm>
             <a:off x="3179880" y="1961280"/>
-            <a:ext cx="2340360" cy="1142280"/>
+            <a:ext cx="2340000" cy="1141920"/>
           </a:xfrm>
           <a:prstGeom prst="rect">
             <a:avLst/>
@@ -10982,14 +10586,14 @@
       </p:sp>
       <p:sp>
         <p:nvSpPr>
-          <p:cNvPr id="146" name="TextBox 10"/>
+          <p:cNvPr id="145" name="TextBox 10"/>
           <p:cNvSpPr/>
           <p:nvPr/>
         </p:nvSpPr>
         <p:spPr>
           <a:xfrm>
             <a:off x="476280" y="3479760"/>
-            <a:ext cx="5236560" cy="329040"/>
+            <a:ext cx="5236200" cy="328680"/>
           </a:xfrm>
           <a:prstGeom prst="rect">
             <a:avLst/>
@@ -11034,14 +10638,14 @@
       </p:sp>
       <p:sp>
         <p:nvSpPr>
-          <p:cNvPr id="147" name="TextBox 10"/>
+          <p:cNvPr id="146" name="TextBox 10"/>
           <p:cNvSpPr/>
           <p:nvPr/>
         </p:nvSpPr>
         <p:spPr>
           <a:xfrm>
             <a:off x="476280" y="3831480"/>
-            <a:ext cx="5146920" cy="713880"/>
+            <a:ext cx="5146560" cy="713520"/>
           </a:xfrm>
           <a:prstGeom prst="rect">
             <a:avLst/>
@@ -11096,14 +10700,14 @@
       </p:sp>
       <p:sp>
         <p:nvSpPr>
-          <p:cNvPr id="148" name="TextBox 20"/>
+          <p:cNvPr id="147" name="TextBox 20"/>
           <p:cNvSpPr/>
           <p:nvPr/>
         </p:nvSpPr>
         <p:spPr>
           <a:xfrm>
             <a:off x="338760" y="160560"/>
-            <a:ext cx="5282640" cy="927720"/>
+            <a:ext cx="5282280" cy="927360"/>
           </a:xfrm>
           <a:prstGeom prst="rect">
             <a:avLst/>
@@ -11136,6 +10740,7 @@
                   <a:srgbClr val="ffffff"/>
                 </a:solidFill>
                 <a:latin typeface="Arial"/>
+                <a:ea typeface="DejaVu Sans"/>
               </a:rPr>
               <a:t>TITLE</a:t>
             </a:r>
